--- a/presentation/IKT NoSql Sql Elastic Search.pptx
+++ b/presentation/IKT NoSql Sql Elastic Search.pptx
@@ -7,10 +7,11 @@
   <p:sldIdLst>
     <p:sldId id="256" r:id="rId2"/>
     <p:sldId id="257" r:id="rId3"/>
-    <p:sldId id="258" r:id="rId4"/>
-    <p:sldId id="259" r:id="rId5"/>
-    <p:sldId id="260" r:id="rId6"/>
-    <p:sldId id="261" r:id="rId7"/>
+    <p:sldId id="262" r:id="rId4"/>
+    <p:sldId id="258" r:id="rId5"/>
+    <p:sldId id="259" r:id="rId6"/>
+    <p:sldId id="260" r:id="rId7"/>
+    <p:sldId id="261" r:id="rId8"/>
   </p:sldIdLst>
   <p:sldSz cx="12192000" cy="6858000"/>
   <p:notesSz cx="6858000" cy="9144000"/>
@@ -120,8 +121,7 @@
 <file path=ppt/revisionInfo.xml><?xml version="1.0" encoding="utf-8"?>
 <p1510:revInfo xmlns:a="http://schemas.openxmlformats.org/drawingml/2006/main" xmlns:r="http://schemas.openxmlformats.org/officeDocument/2006/relationships" xmlns:p1510="http://schemas.microsoft.com/office/powerpoint/2015/10/main">
   <p1510:revLst>
-    <p1510:client id="{1629F522-D3CB-18F1-93F6-8C0AE87C9E43}" v="16" dt="2026-03-31T12:50:47.559"/>
-    <p1510:client id="{C0A5C56B-A0E4-6BD3-6131-9CB4D1AD8AFC}" v="341" dt="2026-03-31T12:47:46.694"/>
+    <p1510:client id="{93730699-C387-F3AA-CD03-6BA47E2D74A8}" v="179" dt="2026-04-13T15:55:23.925"/>
   </p1510:revLst>
 </p1510:revInfo>
 </file>
@@ -282,7 +282,7 @@
           <a:p>
             <a:fld id="{02AC24A9-CCB6-4F8D-B8DB-C2F3692CFA5A}" type="datetimeFigureOut">
               <a:rPr lang="en-US" smtClean="0"/>
-              <a:t>3/31/2026</a:t>
+              <a:t>4/13/2026</a:t>
             </a:fld>
             <a:endParaRPr lang="en-US" dirty="0"/>
           </a:p>
@@ -652,7 +652,7 @@
           <a:p>
             <a:fld id="{02AC24A9-CCB6-4F8D-B8DB-C2F3692CFA5A}" type="datetimeFigureOut">
               <a:rPr lang="en-US" smtClean="0"/>
-              <a:t>3/31/2026</a:t>
+              <a:t>4/13/2026</a:t>
             </a:fld>
             <a:endParaRPr lang="en-US"/>
           </a:p>
@@ -861,7 +861,7 @@
           <a:p>
             <a:fld id="{02AC24A9-CCB6-4F8D-B8DB-C2F3692CFA5A}" type="datetimeFigureOut">
               <a:rPr lang="en-US" smtClean="0"/>
-              <a:t>3/31/2026</a:t>
+              <a:t>4/13/2026</a:t>
             </a:fld>
             <a:endParaRPr lang="en-US"/>
           </a:p>
@@ -1331,7 +1331,7 @@
           <a:p>
             <a:fld id="{02AC24A9-CCB6-4F8D-B8DB-C2F3692CFA5A}" type="datetimeFigureOut">
               <a:rPr lang="en-US" smtClean="0"/>
-              <a:t>3/31/2026</a:t>
+              <a:t>4/13/2026</a:t>
             </a:fld>
             <a:endParaRPr lang="en-US"/>
           </a:p>
@@ -1785,7 +1785,7 @@
           <a:p>
             <a:fld id="{02AC24A9-CCB6-4F8D-B8DB-C2F3692CFA5A}" type="datetimeFigureOut">
               <a:rPr lang="en-US" smtClean="0"/>
-              <a:t>3/31/2026</a:t>
+              <a:t>4/13/2026</a:t>
             </a:fld>
             <a:endParaRPr lang="en-US"/>
           </a:p>
@@ -2317,7 +2317,7 @@
           <a:p>
             <a:fld id="{02AC24A9-CCB6-4F8D-B8DB-C2F3692CFA5A}" type="datetimeFigureOut">
               <a:rPr lang="en-US" smtClean="0"/>
-              <a:t>3/31/2026</a:t>
+              <a:t>4/13/2026</a:t>
             </a:fld>
             <a:endParaRPr lang="en-US"/>
           </a:p>
@@ -3016,7 +3016,7 @@
           <a:p>
             <a:fld id="{02AC24A9-CCB6-4F8D-B8DB-C2F3692CFA5A}" type="datetimeFigureOut">
               <a:rPr lang="en-US" smtClean="0"/>
-              <a:t>3/31/2026</a:t>
+              <a:t>4/13/2026</a:t>
             </a:fld>
             <a:endParaRPr lang="en-US"/>
           </a:p>
@@ -3345,7 +3345,7 @@
           <a:p>
             <a:fld id="{02AC24A9-CCB6-4F8D-B8DB-C2F3692CFA5A}" type="datetimeFigureOut">
               <a:rPr lang="en-US" smtClean="0"/>
-              <a:t>3/31/2026</a:t>
+              <a:t>4/13/2026</a:t>
             </a:fld>
             <a:endParaRPr lang="en-US"/>
           </a:p>
@@ -3458,7 +3458,7 @@
           <a:p>
             <a:fld id="{02AC24A9-CCB6-4F8D-B8DB-C2F3692CFA5A}" type="datetimeFigureOut">
               <a:rPr lang="en-US" smtClean="0"/>
-              <a:t>3/31/2026</a:t>
+              <a:t>4/13/2026</a:t>
             </a:fld>
             <a:endParaRPr lang="en-US"/>
           </a:p>
@@ -3953,7 +3953,7 @@
           <a:p>
             <a:fld id="{02AC24A9-CCB6-4F8D-B8DB-C2F3692CFA5A}" type="datetimeFigureOut">
               <a:rPr lang="en-US" smtClean="0"/>
-              <a:t>3/31/2026</a:t>
+              <a:t>4/13/2026</a:t>
             </a:fld>
             <a:endParaRPr lang="en-US" dirty="0"/>
           </a:p>
@@ -4430,7 +4430,7 @@
           <a:p>
             <a:fld id="{02AC24A9-CCB6-4F8D-B8DB-C2F3692CFA5A}" type="datetimeFigureOut">
               <a:rPr lang="en-US" smtClean="0"/>
-              <a:t>3/31/2026</a:t>
+              <a:t>4/13/2026</a:t>
             </a:fld>
             <a:endParaRPr lang="en-US"/>
           </a:p>
@@ -4673,7 +4673,7 @@
           <a:p>
             <a:fld id="{02AC24A9-CCB6-4F8D-B8DB-C2F3692CFA5A}" type="datetimeFigureOut">
               <a:rPr lang="en-US" smtClean="0"/>
-              <a:t>3/31/2026</a:t>
+              <a:t>4/13/2026</a:t>
             </a:fld>
             <a:endParaRPr lang="en-US"/>
           </a:p>
@@ -5719,7 +5719,7 @@
           <p:cNvPr id="2" name="Title 1">
             <a:extLst>
               <a:ext uri="{FF2B5EF4-FFF2-40B4-BE49-F238E27FC236}">
-                <a16:creationId xmlns:a16="http://schemas.microsoft.com/office/drawing/2014/main" id="{3EFEEB55-547C-FCDF-229A-090DB5461C0F}"/>
+                <a16:creationId xmlns:a16="http://schemas.microsoft.com/office/drawing/2014/main" id="{302F263B-A652-181B-673E-98A944A25D16}"/>
               </a:ext>
             </a:extLst>
           </p:cNvPr>
@@ -5736,14 +5736,30 @@
           <a:lstStyle/>
           <a:p>
             <a:r>
-              <a:rPr lang="en-GB" dirty="0"/>
-              <a:t>Mi a </a:t>
-            </a:r>
-            <a:r>
-              <a:rPr lang="en-GB"/>
-              <a:t>NoSQL</a:t>
-            </a:r>
-            <a:endParaRPr lang="en-GB" dirty="0"/>
+              <a:rPr lang="en-GB" dirty="0">
+                <a:ea typeface="+mj-lt"/>
+                <a:cs typeface="+mj-lt"/>
+              </a:rPr>
+              <a:t>ACID </a:t>
+            </a:r>
+            <a:r>
+              <a:rPr lang="en-GB" dirty="0" err="1">
+                <a:ea typeface="+mj-lt"/>
+                <a:cs typeface="+mj-lt"/>
+              </a:rPr>
+              <a:t>tulajdonságok</a:t>
+            </a:r>
+            <a:r>
+              <a:rPr lang="en-GB" dirty="0">
+                <a:ea typeface="+mj-lt"/>
+                <a:cs typeface="+mj-lt"/>
+              </a:rPr>
+              <a:t> SQL-ben</a:t>
+            </a:r>
+            <a:endParaRPr lang="en-US" dirty="0">
+              <a:ea typeface="+mj-lt"/>
+              <a:cs typeface="+mj-lt"/>
+            </a:endParaRPr>
           </a:p>
         </p:txBody>
       </p:sp>
@@ -5752,7 +5768,7 @@
           <p:cNvPr id="3" name="Content Placeholder 2">
             <a:extLst>
               <a:ext uri="{FF2B5EF4-FFF2-40B4-BE49-F238E27FC236}">
-                <a16:creationId xmlns:a16="http://schemas.microsoft.com/office/drawing/2014/main" id="{5AEAC592-398C-C91C-176B-D3569E73E99B}"/>
+                <a16:creationId xmlns:a16="http://schemas.microsoft.com/office/drawing/2014/main" id="{2A84BCC9-4C85-A19D-F0D9-4B1E5D94461E}"/>
               </a:ext>
             </a:extLst>
           </p:cNvPr>
@@ -5763,13 +5779,321 @@
             <p:ph idx="1"/>
           </p:nvPr>
         </p:nvSpPr>
-        <p:spPr/>
+        <p:spPr>
+          <a:xfrm>
+            <a:off x="529414" y="1882101"/>
+            <a:ext cx="10168128" cy="3694176"/>
+          </a:xfrm>
+        </p:spPr>
         <p:txBody>
           <a:bodyPr vert="horz" lIns="91440" tIns="45720" rIns="91440" bIns="45720" rtlCol="0" anchor="t">
             <a:normAutofit/>
           </a:bodyPr>
           <a:lstStyle/>
           <a:p>
+            <a:pPr marL="0" indent="0">
+              <a:buNone/>
+            </a:pPr>
+            <a:r>
+              <a:rPr lang="en-GB" dirty="0"/>
+              <a:t>Az ACID a </a:t>
+            </a:r>
+            <a:r>
+              <a:rPr lang="en-GB" dirty="0" err="1"/>
+              <a:t>tranzakciók</a:t>
+            </a:r>
+            <a:r>
+              <a:rPr lang="en-GB" dirty="0"/>
+              <a:t> </a:t>
+            </a:r>
+            <a:r>
+              <a:rPr lang="en-GB" dirty="0" err="1"/>
+              <a:t>működésének</a:t>
+            </a:r>
+            <a:r>
+              <a:rPr lang="en-GB" dirty="0"/>
+              <a:t> </a:t>
+            </a:r>
+            <a:r>
+              <a:rPr lang="en-GB" dirty="0" err="1"/>
+              <a:t>szabályrendszere</a:t>
+            </a:r>
+            <a:endParaRPr lang="en-GB"/>
+          </a:p>
+          <a:p>
+            <a:endParaRPr lang="en-GB"/>
+          </a:p>
+          <a:p>
+            <a:r>
+              <a:rPr lang="en-GB" i="1" dirty="0"/>
+              <a:t>Atomicity</a:t>
+            </a:r>
+            <a:r>
+              <a:rPr lang="en-GB" dirty="0"/>
+              <a:t> = Minden </a:t>
+            </a:r>
+            <a:r>
+              <a:rPr lang="en-GB" dirty="0" err="1"/>
+              <a:t>vagy</a:t>
+            </a:r>
+            <a:r>
+              <a:rPr lang="en-GB" dirty="0"/>
+              <a:t> </a:t>
+            </a:r>
+            <a:r>
+              <a:rPr lang="en-GB" dirty="0" err="1"/>
+              <a:t>semmi</a:t>
+            </a:r>
+            <a:r>
+              <a:rPr lang="en-GB" dirty="0"/>
+              <a:t> (</a:t>
+            </a:r>
+            <a:r>
+              <a:rPr lang="en-GB" dirty="0" err="1"/>
+              <a:t>hiba</a:t>
+            </a:r>
+            <a:r>
+              <a:rPr lang="en-GB" dirty="0"/>
+              <a:t> </a:t>
+            </a:r>
+            <a:r>
+              <a:rPr lang="en-GB" dirty="0" err="1"/>
+              <a:t>esetén</a:t>
+            </a:r>
+            <a:r>
+              <a:rPr lang="en-GB" dirty="0"/>
+              <a:t> </a:t>
+            </a:r>
+            <a:r>
+              <a:rPr lang="en-GB" dirty="0" err="1"/>
+              <a:t>visszavonás</a:t>
+            </a:r>
+            <a:r>
+              <a:rPr lang="en-GB" dirty="0"/>
+              <a:t>)</a:t>
+            </a:r>
+          </a:p>
+          <a:p>
+            <a:r>
+              <a:rPr lang="en-GB" i="1" dirty="0"/>
+              <a:t>Consistency</a:t>
+            </a:r>
+            <a:r>
+              <a:rPr lang="en-GB" dirty="0"/>
+              <a:t> = Az </a:t>
+            </a:r>
+            <a:r>
+              <a:rPr lang="en-GB" dirty="0" err="1"/>
+              <a:t>adatbázis</a:t>
+            </a:r>
+            <a:r>
+              <a:rPr lang="en-GB" dirty="0"/>
+              <a:t> </a:t>
+            </a:r>
+            <a:r>
+              <a:rPr lang="en-GB" dirty="0" err="1"/>
+              <a:t>mindig</a:t>
+            </a:r>
+            <a:r>
+              <a:rPr lang="en-GB" dirty="0"/>
+              <a:t> </a:t>
+            </a:r>
+            <a:r>
+              <a:rPr lang="en-GB" dirty="0" err="1"/>
+              <a:t>helyes</a:t>
+            </a:r>
+            <a:r>
+              <a:rPr lang="en-GB" dirty="0"/>
+              <a:t> </a:t>
+            </a:r>
+            <a:r>
+              <a:rPr lang="en-GB" dirty="0" err="1"/>
+              <a:t>állapotban</a:t>
+            </a:r>
+            <a:r>
+              <a:rPr lang="en-GB" dirty="0"/>
+              <a:t> </a:t>
+            </a:r>
+            <a:r>
+              <a:rPr lang="en-GB" dirty="0" err="1"/>
+              <a:t>marad</a:t>
+            </a:r>
+            <a:endParaRPr lang="en-GB" dirty="0"/>
+          </a:p>
+          <a:p>
+            <a:r>
+              <a:rPr lang="en-GB" i="1" dirty="0"/>
+              <a:t>Isolation</a:t>
+            </a:r>
+            <a:r>
+              <a:rPr lang="en-GB" dirty="0"/>
+              <a:t> = </a:t>
+            </a:r>
+            <a:r>
+              <a:rPr lang="en-GB" dirty="0" err="1"/>
+              <a:t>Tranzakciók</a:t>
+            </a:r>
+            <a:r>
+              <a:rPr lang="en-GB" dirty="0"/>
+              <a:t> </a:t>
+            </a:r>
+            <a:r>
+              <a:rPr lang="en-GB" dirty="0" err="1"/>
+              <a:t>nem</a:t>
+            </a:r>
+            <a:r>
+              <a:rPr lang="en-GB" dirty="0"/>
+              <a:t> </a:t>
+            </a:r>
+            <a:r>
+              <a:rPr lang="en-GB" dirty="0" err="1"/>
+              <a:t>zavarják</a:t>
+            </a:r>
+            <a:r>
+              <a:rPr lang="en-GB" dirty="0"/>
+              <a:t> </a:t>
+            </a:r>
+            <a:r>
+              <a:rPr lang="en-GB" dirty="0" err="1"/>
+              <a:t>egymást</a:t>
+            </a:r>
+            <a:endParaRPr lang="en-GB" dirty="0"/>
+          </a:p>
+          <a:p>
+            <a:r>
+              <a:rPr lang="en-GB" i="1" dirty="0"/>
+              <a:t>Durability</a:t>
+            </a:r>
+            <a:r>
+              <a:rPr lang="en-GB" dirty="0"/>
+              <a:t> = </a:t>
+            </a:r>
+            <a:r>
+              <a:rPr lang="en-GB" dirty="0" err="1"/>
+              <a:t>Mentett</a:t>
+            </a:r>
+            <a:r>
+              <a:rPr lang="en-GB" dirty="0"/>
+              <a:t> </a:t>
+            </a:r>
+            <a:r>
+              <a:rPr lang="en-GB" dirty="0" err="1"/>
+              <a:t>adatok</a:t>
+            </a:r>
+            <a:r>
+              <a:rPr lang="en-GB" dirty="0"/>
+              <a:t> </a:t>
+            </a:r>
+            <a:r>
+              <a:rPr lang="en-GB" dirty="0" err="1"/>
+              <a:t>nem</a:t>
+            </a:r>
+            <a:r>
+              <a:rPr lang="en-GB" dirty="0"/>
+              <a:t> </a:t>
+            </a:r>
+            <a:r>
+              <a:rPr lang="en-GB" dirty="0" err="1"/>
+              <a:t>vesznek</a:t>
+            </a:r>
+            <a:r>
+              <a:rPr lang="en-GB" dirty="0"/>
+              <a:t> </a:t>
+            </a:r>
+            <a:r>
+              <a:rPr lang="en-GB" dirty="0" err="1"/>
+              <a:t>el</a:t>
+            </a:r>
+            <a:endParaRPr lang="en-GB" dirty="0"/>
+          </a:p>
+        </p:txBody>
+      </p:sp>
+    </p:spTree>
+    <p:extLst>
+      <p:ext uri="{BB962C8B-B14F-4D97-AF65-F5344CB8AC3E}">
+        <p14:creationId xmlns:p14="http://schemas.microsoft.com/office/powerpoint/2010/main" val="1702948451"/>
+      </p:ext>
+    </p:extLst>
+  </p:cSld>
+  <p:clrMapOvr>
+    <a:masterClrMapping/>
+  </p:clrMapOvr>
+</p:sld>
+</file>
+
+<file path=ppt/slides/slide4.xml><?xml version="1.0" encoding="utf-8"?>
+<p:sld xmlns:a="http://schemas.openxmlformats.org/drawingml/2006/main" xmlns:r="http://schemas.openxmlformats.org/officeDocument/2006/relationships" xmlns:p="http://schemas.openxmlformats.org/presentationml/2006/main">
+  <p:cSld>
+    <p:spTree>
+      <p:nvGrpSpPr>
+        <p:cNvPr id="1" name=""/>
+        <p:cNvGrpSpPr/>
+        <p:nvPr/>
+      </p:nvGrpSpPr>
+      <p:grpSpPr>
+        <a:xfrm>
+          <a:off x="0" y="0"/>
+          <a:ext cx="0" cy="0"/>
+          <a:chOff x="0" y="0"/>
+          <a:chExt cx="0" cy="0"/>
+        </a:xfrm>
+      </p:grpSpPr>
+      <p:sp>
+        <p:nvSpPr>
+          <p:cNvPr id="2" name="Title 1">
+            <a:extLst>
+              <a:ext uri="{FF2B5EF4-FFF2-40B4-BE49-F238E27FC236}">
+                <a16:creationId xmlns:a16="http://schemas.microsoft.com/office/drawing/2014/main" id="{3EFEEB55-547C-FCDF-229A-090DB5461C0F}"/>
+              </a:ext>
+            </a:extLst>
+          </p:cNvPr>
+          <p:cNvSpPr>
+            <a:spLocks noGrp="1"/>
+          </p:cNvSpPr>
+          <p:nvPr>
+            <p:ph type="title"/>
+          </p:nvPr>
+        </p:nvSpPr>
+        <p:spPr/>
+        <p:txBody>
+          <a:bodyPr/>
+          <a:lstStyle/>
+          <a:p>
+            <a:r>
+              <a:rPr lang="en-GB" dirty="0"/>
+              <a:t>Mi a </a:t>
+            </a:r>
+            <a:r>
+              <a:rPr lang="en-GB"/>
+              <a:t>NoSQL</a:t>
+            </a:r>
+            <a:endParaRPr lang="en-GB" dirty="0"/>
+          </a:p>
+        </p:txBody>
+      </p:sp>
+      <p:sp>
+        <p:nvSpPr>
+          <p:cNvPr id="3" name="Content Placeholder 2">
+            <a:extLst>
+              <a:ext uri="{FF2B5EF4-FFF2-40B4-BE49-F238E27FC236}">
+                <a16:creationId xmlns:a16="http://schemas.microsoft.com/office/drawing/2014/main" id="{5AEAC592-398C-C91C-176B-D3569E73E99B}"/>
+              </a:ext>
+            </a:extLst>
+          </p:cNvPr>
+          <p:cNvSpPr>
+            <a:spLocks noGrp="1"/>
+          </p:cNvSpPr>
+          <p:nvPr>
+            <p:ph idx="1"/>
+          </p:nvPr>
+        </p:nvSpPr>
+        <p:spPr/>
+        <p:txBody>
+          <a:bodyPr vert="horz" lIns="91440" tIns="45720" rIns="91440" bIns="45720" rtlCol="0" anchor="t">
+            <a:normAutofit/>
+          </a:bodyPr>
+          <a:lstStyle/>
+          <a:p>
             <a:r>
               <a:rPr lang="en-GB" dirty="0"/>
               <a:t>Nem </a:t>
@@ -5786,6 +6110,7 @@
               <a:rPr lang="en-GB" dirty="0" err="1"/>
               <a:t>adatbázis</a:t>
             </a:r>
+            <a:endParaRPr lang="en-GB" dirty="0"/>
           </a:p>
           <a:p>
             <a:r>
@@ -5798,11 +6123,7 @@
             </a:r>
             <a:r>
               <a:rPr lang="en-GB" dirty="0" err="1"/>
-              <a:t>adatmodel</a:t>
-            </a:r>
-            <a:r>
-              <a:rPr lang="en-GB" dirty="0"/>
-              <a:t>l</a:t>
+              <a:t>adatmodell</a:t>
             </a:r>
           </a:p>
           <a:p>
@@ -5822,6 +6143,7 @@
               <a:rPr lang="en-GB" dirty="0" err="1"/>
               <a:t>alapú</a:t>
             </a:r>
+            <a:endParaRPr lang="en-GB" dirty="0"/>
           </a:p>
           <a:p>
             <a:r>
@@ -5830,7 +6152,15 @@
             </a:r>
             <a:r>
               <a:rPr lang="en-GB" dirty="0"/>
-              <a:t>: MongoDB, Firebase</a:t>
+              <a:t>: </a:t>
+            </a:r>
+            <a:r>
+              <a:rPr lang="en-GB" i="1" dirty="0"/>
+              <a:t>MongoDB</a:t>
+            </a:r>
+            <a:r>
+              <a:rPr lang="en-GB" dirty="0"/>
+              <a:t>, Firebase</a:t>
             </a:r>
           </a:p>
         </p:txBody>
@@ -5848,7 +6178,7 @@
 </p:sld>
 </file>
 
-<file path=ppt/slides/slide4.xml><?xml version="1.0" encoding="utf-8"?>
+<file path=ppt/slides/slide5.xml><?xml version="1.0" encoding="utf-8"?>
 <p:sld xmlns:a="http://schemas.openxmlformats.org/drawingml/2006/main" xmlns:r="http://schemas.openxmlformats.org/officeDocument/2006/relationships" xmlns:p="http://schemas.openxmlformats.org/presentationml/2006/main">
   <p:cSld>
     <p:bg>
@@ -6609,7 +6939,7 @@
 </p:sld>
 </file>
 
-<file path=ppt/slides/slide5.xml><?xml version="1.0" encoding="utf-8"?>
+<file path=ppt/slides/slide6.xml><?xml version="1.0" encoding="utf-8"?>
 <p:sld xmlns:a="http://schemas.openxmlformats.org/drawingml/2006/main" xmlns:r="http://schemas.openxmlformats.org/officeDocument/2006/relationships" xmlns:p="http://schemas.openxmlformats.org/presentationml/2006/main">
   <p:cSld>
     <p:spTree>
@@ -6814,7 +7144,7 @@
 </p:sld>
 </file>
 
-<file path=ppt/slides/slide6.xml><?xml version="1.0" encoding="utf-8"?>
+<file path=ppt/slides/slide7.xml><?xml version="1.0" encoding="utf-8"?>
 <p:sld xmlns:a="http://schemas.openxmlformats.org/drawingml/2006/main" xmlns:r="http://schemas.openxmlformats.org/officeDocument/2006/relationships" xmlns:p="http://schemas.openxmlformats.org/presentationml/2006/main">
   <p:cSld>
     <p:bg>

--- a/presentation/IKT NoSql Sql Elastic Search.pptx
+++ b/presentation/IKT NoSql Sql Elastic Search.pptx
@@ -4,14 +4,19 @@
   <p:sldMasterIdLst>
     <p:sldMasterId id="2147483724" r:id="rId1"/>
   </p:sldMasterIdLst>
+  <p:notesMasterIdLst>
+    <p:notesMasterId r:id="rId11"/>
+  </p:notesMasterIdLst>
   <p:sldIdLst>
     <p:sldId id="256" r:id="rId2"/>
     <p:sldId id="257" r:id="rId3"/>
-    <p:sldId id="262" r:id="rId4"/>
+    <p:sldId id="264" r:id="rId4"/>
     <p:sldId id="258" r:id="rId5"/>
     <p:sldId id="259" r:id="rId6"/>
-    <p:sldId id="260" r:id="rId7"/>
-    <p:sldId id="261" r:id="rId8"/>
+    <p:sldId id="262" r:id="rId7"/>
+    <p:sldId id="263" r:id="rId8"/>
+    <p:sldId id="260" r:id="rId9"/>
+    <p:sldId id="261" r:id="rId10"/>
   </p:sldIdLst>
   <p:sldSz cx="12192000" cy="6858000"/>
   <p:notesSz cx="6858000" cy="9144000"/>
@@ -121,9 +126,1100 @@
 <file path=ppt/revisionInfo.xml><?xml version="1.0" encoding="utf-8"?>
 <p1510:revInfo xmlns:a="http://schemas.openxmlformats.org/drawingml/2006/main" xmlns:r="http://schemas.openxmlformats.org/officeDocument/2006/relationships" xmlns:p1510="http://schemas.microsoft.com/office/powerpoint/2015/10/main">
   <p1510:revLst>
-    <p1510:client id="{93730699-C387-F3AA-CD03-6BA47E2D74A8}" v="179" dt="2026-04-13T15:55:23.925"/>
+    <p1510:client id="{F718D3C6-9CDE-0C1B-5FA4-BEA09F00D28E}" v="237" dt="2026-04-14T15:37:47.534"/>
   </p1510:revLst>
 </p1510:revInfo>
+</file>
+
+<file path=ppt/changesInfos/changesInfo1.xml><?xml version="1.0" encoding="utf-8"?>
+<pc:chgInfo xmlns:a="http://schemas.openxmlformats.org/drawingml/2006/main" xmlns:r="http://schemas.openxmlformats.org/officeDocument/2006/relationships" xmlns:ac="http://schemas.microsoft.com/office/drawing/2013/main/command" xmlns:pc="http://schemas.microsoft.com/office/powerpoint/2013/main/command">
+  <pc:docChgLst>
+    <pc:chgData name="Börzsönyi Gergő 642" userId="S::borger642@logiker.hu::e7dba601-4e09-4003-b553-b590b71c507a" providerId="AD" clId="Web-{F718D3C6-9CDE-0C1B-5FA4-BEA09F00D28E}"/>
+    <pc:docChg chg="addSld modSld sldOrd">
+      <pc:chgData name="Börzsönyi Gergő 642" userId="S::borger642@logiker.hu::e7dba601-4e09-4003-b553-b590b71c507a" providerId="AD" clId="Web-{F718D3C6-9CDE-0C1B-5FA4-BEA09F00D28E}" dt="2026-04-14T15:38:49.521" v="401"/>
+      <pc:docMkLst>
+        <pc:docMk/>
+      </pc:docMkLst>
+      <pc:sldChg chg="addSp modSp">
+        <pc:chgData name="Börzsönyi Gergő 642" userId="S::borger642@logiker.hu::e7dba601-4e09-4003-b553-b590b71c507a" providerId="AD" clId="Web-{F718D3C6-9CDE-0C1B-5FA4-BEA09F00D28E}" dt="2026-04-14T15:30:07.087" v="341" actId="20577"/>
+        <pc:sldMkLst>
+          <pc:docMk/>
+          <pc:sldMk cId="809816520" sldId="258"/>
+        </pc:sldMkLst>
+        <pc:spChg chg="mod">
+          <ac:chgData name="Börzsönyi Gergő 642" userId="S::borger642@logiker.hu::e7dba601-4e09-4003-b553-b590b71c507a" providerId="AD" clId="Web-{F718D3C6-9CDE-0C1B-5FA4-BEA09F00D28E}" dt="2026-04-14T15:30:07.087" v="341" actId="20577"/>
+          <ac:spMkLst>
+            <pc:docMk/>
+            <pc:sldMk cId="809816520" sldId="258"/>
+            <ac:spMk id="3" creationId="{5AEAC592-398C-C91C-176B-D3569E73E99B}"/>
+          </ac:spMkLst>
+        </pc:spChg>
+        <pc:spChg chg="add mod">
+          <ac:chgData name="Börzsönyi Gergő 642" userId="S::borger642@logiker.hu::e7dba601-4e09-4003-b553-b590b71c507a" providerId="AD" clId="Web-{F718D3C6-9CDE-0C1B-5FA4-BEA09F00D28E}" dt="2026-04-14T14:49:42.305" v="17"/>
+          <ac:spMkLst>
+            <pc:docMk/>
+            <pc:sldMk cId="809816520" sldId="258"/>
+            <ac:spMk id="4" creationId="{3492A3B8-F27A-CC6E-10E4-9ED796C95714}"/>
+          </ac:spMkLst>
+        </pc:spChg>
+      </pc:sldChg>
+      <pc:sldChg chg="modSp ord modNotes">
+        <pc:chgData name="Börzsönyi Gergő 642" userId="S::borger642@logiker.hu::e7dba601-4e09-4003-b553-b590b71c507a" providerId="AD" clId="Web-{F718D3C6-9CDE-0C1B-5FA4-BEA09F00D28E}" dt="2026-04-14T15:33:23.182" v="381" actId="20577"/>
+        <pc:sldMkLst>
+          <pc:docMk/>
+          <pc:sldMk cId="3477171168" sldId="260"/>
+        </pc:sldMkLst>
+        <pc:spChg chg="mod">
+          <ac:chgData name="Börzsönyi Gergő 642" userId="S::borger642@logiker.hu::e7dba601-4e09-4003-b553-b590b71c507a" providerId="AD" clId="Web-{F718D3C6-9CDE-0C1B-5FA4-BEA09F00D28E}" dt="2026-04-14T15:33:23.182" v="381" actId="20577"/>
+          <ac:spMkLst>
+            <pc:docMk/>
+            <pc:sldMk cId="3477171168" sldId="260"/>
+            <ac:spMk id="2" creationId="{41DB42AF-D2CE-8C6D-D5EA-10594770E34A}"/>
+          </ac:spMkLst>
+        </pc:spChg>
+        <pc:spChg chg="mod">
+          <ac:chgData name="Börzsönyi Gergő 642" userId="S::borger642@logiker.hu::e7dba601-4e09-4003-b553-b590b71c507a" providerId="AD" clId="Web-{F718D3C6-9CDE-0C1B-5FA4-BEA09F00D28E}" dt="2026-04-14T15:33:20.041" v="380" actId="20577"/>
+          <ac:spMkLst>
+            <pc:docMk/>
+            <pc:sldMk cId="3477171168" sldId="260"/>
+            <ac:spMk id="3" creationId="{8DB5E57F-C073-9CCB-9458-75945F62FD08}"/>
+          </ac:spMkLst>
+        </pc:spChg>
+      </pc:sldChg>
+      <pc:sldChg chg="modSp">
+        <pc:chgData name="Börzsönyi Gergő 642" userId="S::borger642@logiker.hu::e7dba601-4e09-4003-b553-b590b71c507a" providerId="AD" clId="Web-{F718D3C6-9CDE-0C1B-5FA4-BEA09F00D28E}" dt="2026-04-14T15:25:54.741" v="248" actId="20577"/>
+        <pc:sldMkLst>
+          <pc:docMk/>
+          <pc:sldMk cId="2108888516" sldId="261"/>
+        </pc:sldMkLst>
+        <pc:spChg chg="mod">
+          <ac:chgData name="Börzsönyi Gergő 642" userId="S::borger642@logiker.hu::e7dba601-4e09-4003-b553-b590b71c507a" providerId="AD" clId="Web-{F718D3C6-9CDE-0C1B-5FA4-BEA09F00D28E}" dt="2026-04-14T15:25:54.741" v="248" actId="20577"/>
+          <ac:spMkLst>
+            <pc:docMk/>
+            <pc:sldMk cId="2108888516" sldId="261"/>
+            <ac:spMk id="2" creationId="{407B0BE9-C02D-D784-BBC2-BFE0BAFEB6A8}"/>
+          </ac:spMkLst>
+        </pc:spChg>
+      </pc:sldChg>
+      <pc:sldChg chg="addSp modSp new modNotes">
+        <pc:chgData name="Börzsönyi Gergő 642" userId="S::borger642@logiker.hu::e7dba601-4e09-4003-b553-b590b71c507a" providerId="AD" clId="Web-{F718D3C6-9CDE-0C1B-5FA4-BEA09F00D28E}" dt="2026-04-14T15:28:04.195" v="328" actId="20577"/>
+        <pc:sldMkLst>
+          <pc:docMk/>
+          <pc:sldMk cId="3553344801" sldId="262"/>
+        </pc:sldMkLst>
+        <pc:spChg chg="mod">
+          <ac:chgData name="Börzsönyi Gergő 642" userId="S::borger642@logiker.hu::e7dba601-4e09-4003-b553-b590b71c507a" providerId="AD" clId="Web-{F718D3C6-9CDE-0C1B-5FA4-BEA09F00D28E}" dt="2026-04-14T15:28:04.195" v="328" actId="20577"/>
+          <ac:spMkLst>
+            <pc:docMk/>
+            <pc:sldMk cId="3553344801" sldId="262"/>
+            <ac:spMk id="2" creationId="{5A14A4F9-121F-DC50-AB45-B19769E6C514}"/>
+          </ac:spMkLst>
+        </pc:spChg>
+        <pc:spChg chg="mod">
+          <ac:chgData name="Börzsönyi Gergő 642" userId="S::borger642@logiker.hu::e7dba601-4e09-4003-b553-b590b71c507a" providerId="AD" clId="Web-{F718D3C6-9CDE-0C1B-5FA4-BEA09F00D28E}" dt="2026-04-14T15:23:29.443" v="195" actId="14100"/>
+          <ac:spMkLst>
+            <pc:docMk/>
+            <pc:sldMk cId="3553344801" sldId="262"/>
+            <ac:spMk id="3" creationId="{8170D858-6851-EBE4-E050-BC262E5C6E04}"/>
+          </ac:spMkLst>
+        </pc:spChg>
+        <pc:spChg chg="add mod">
+          <ac:chgData name="Börzsönyi Gergő 642" userId="S::borger642@logiker.hu::e7dba601-4e09-4003-b553-b590b71c507a" providerId="AD" clId="Web-{F718D3C6-9CDE-0C1B-5FA4-BEA09F00D28E}" dt="2026-04-14T15:24:01.568" v="200"/>
+          <ac:spMkLst>
+            <pc:docMk/>
+            <pc:sldMk cId="3553344801" sldId="262"/>
+            <ac:spMk id="5" creationId="{1AF96909-4617-6D0F-7143-9FC480361F39}"/>
+          </ac:spMkLst>
+        </pc:spChg>
+        <pc:picChg chg="add mod">
+          <ac:chgData name="Börzsönyi Gergő 642" userId="S::borger642@logiker.hu::e7dba601-4e09-4003-b553-b590b71c507a" providerId="AD" clId="Web-{F718D3C6-9CDE-0C1B-5FA4-BEA09F00D28E}" dt="2026-04-14T15:23:24.411" v="192" actId="1076"/>
+          <ac:picMkLst>
+            <pc:docMk/>
+            <pc:sldMk cId="3553344801" sldId="262"/>
+            <ac:picMk id="4" creationId="{2D117A64-25BB-3A4A-EC7F-61DA2443DBE8}"/>
+          </ac:picMkLst>
+        </pc:picChg>
+      </pc:sldChg>
+      <pc:sldChg chg="modSp new modNotes">
+        <pc:chgData name="Börzsönyi Gergő 642" userId="S::borger642@logiker.hu::e7dba601-4e09-4003-b553-b590b71c507a" providerId="AD" clId="Web-{F718D3C6-9CDE-0C1B-5FA4-BEA09F00D28E}" dt="2026-04-14T15:38:49.521" v="401"/>
+        <pc:sldMkLst>
+          <pc:docMk/>
+          <pc:sldMk cId="1306639778" sldId="263"/>
+        </pc:sldMkLst>
+        <pc:spChg chg="mod">
+          <ac:chgData name="Börzsönyi Gergő 642" userId="S::borger642@logiker.hu::e7dba601-4e09-4003-b553-b590b71c507a" providerId="AD" clId="Web-{F718D3C6-9CDE-0C1B-5FA4-BEA09F00D28E}" dt="2026-04-14T15:28:07.445" v="329" actId="20577"/>
+          <ac:spMkLst>
+            <pc:docMk/>
+            <pc:sldMk cId="1306639778" sldId="263"/>
+            <ac:spMk id="2" creationId="{4BB6DE51-2FD8-E60C-B979-EF19298C34C0}"/>
+          </ac:spMkLst>
+        </pc:spChg>
+        <pc:spChg chg="mod">
+          <ac:chgData name="Börzsönyi Gergő 642" userId="S::borger642@logiker.hu::e7dba601-4e09-4003-b553-b590b71c507a" providerId="AD" clId="Web-{F718D3C6-9CDE-0C1B-5FA4-BEA09F00D28E}" dt="2026-04-14T15:34:04.375" v="386" actId="20577"/>
+          <ac:spMkLst>
+            <pc:docMk/>
+            <pc:sldMk cId="1306639778" sldId="263"/>
+            <ac:spMk id="3" creationId="{49B59618-FE93-D299-585C-B961FE49460A}"/>
+          </ac:spMkLst>
+        </pc:spChg>
+      </pc:sldChg>
+    </pc:docChg>
+  </pc:docChgLst>
+</pc:chgInfo>
+</file>
+
+<file path=ppt/notesMasters/notesMaster1.xml><?xml version="1.0" encoding="utf-8"?>
+<p:notesMaster xmlns:a="http://schemas.openxmlformats.org/drawingml/2006/main" xmlns:r="http://schemas.openxmlformats.org/officeDocument/2006/relationships" xmlns:p="http://schemas.openxmlformats.org/presentationml/2006/main">
+  <p:cSld>
+    <p:bg>
+      <p:bgRef idx="1001">
+        <a:schemeClr val="bg1"/>
+      </p:bgRef>
+    </p:bg>
+    <p:spTree>
+      <p:nvGrpSpPr>
+        <p:cNvPr id="1" name=""/>
+        <p:cNvGrpSpPr/>
+        <p:nvPr/>
+      </p:nvGrpSpPr>
+      <p:grpSpPr>
+        <a:xfrm>
+          <a:off x="0" y="0"/>
+          <a:ext cx="0" cy="0"/>
+          <a:chOff x="0" y="0"/>
+          <a:chExt cx="0" cy="0"/>
+        </a:xfrm>
+      </p:grpSpPr>
+      <p:sp>
+        <p:nvSpPr>
+          <p:cNvPr id="2" name="Header Placeholder 1"/>
+          <p:cNvSpPr>
+            <a:spLocks noGrp="1"/>
+          </p:cNvSpPr>
+          <p:nvPr>
+            <p:ph type="hdr" sz="quarter"/>
+          </p:nvPr>
+        </p:nvSpPr>
+        <p:spPr>
+          <a:xfrm>
+            <a:off x="0" y="0"/>
+            <a:ext cx="2971800" cy="458788"/>
+          </a:xfrm>
+          <a:prstGeom prst="rect">
+            <a:avLst/>
+          </a:prstGeom>
+        </p:spPr>
+        <p:txBody>
+          <a:bodyPr vert="horz" lIns="91440" tIns="45720" rIns="91440" bIns="45720" rtlCol="0"/>
+          <a:lstStyle>
+            <a:lvl1pPr algn="l">
+              <a:defRPr sz="1200"/>
+            </a:lvl1pPr>
+          </a:lstStyle>
+          <a:p>
+            <a:endParaRPr lang="en-US"/>
+          </a:p>
+        </p:txBody>
+      </p:sp>
+      <p:sp>
+        <p:nvSpPr>
+          <p:cNvPr id="3" name="Date Placeholder 2"/>
+          <p:cNvSpPr>
+            <a:spLocks noGrp="1"/>
+          </p:cNvSpPr>
+          <p:nvPr>
+            <p:ph type="dt" idx="1"/>
+          </p:nvPr>
+        </p:nvSpPr>
+        <p:spPr>
+          <a:xfrm>
+            <a:off x="3884613" y="0"/>
+            <a:ext cx="2971800" cy="458788"/>
+          </a:xfrm>
+          <a:prstGeom prst="rect">
+            <a:avLst/>
+          </a:prstGeom>
+        </p:spPr>
+        <p:txBody>
+          <a:bodyPr vert="horz" lIns="91440" tIns="45720" rIns="91440" bIns="45720" rtlCol="0"/>
+          <a:lstStyle>
+            <a:lvl1pPr algn="r">
+              <a:defRPr sz="1200"/>
+            </a:lvl1pPr>
+          </a:lstStyle>
+          <a:p>
+            <a:fld id="{5FA837B7-5301-4EA9-B0CE-8405836672D0}" type="datetimeFigureOut">
+              <a:t>2026. 04. 15.</a:t>
+            </a:fld>
+            <a:endParaRPr lang="en-US"/>
+          </a:p>
+        </p:txBody>
+      </p:sp>
+      <p:sp>
+        <p:nvSpPr>
+          <p:cNvPr id="4" name="Slide Image Placeholder 3"/>
+          <p:cNvSpPr>
+            <a:spLocks noGrp="1" noRot="1" noChangeAspect="1"/>
+          </p:cNvSpPr>
+          <p:nvPr>
+            <p:ph type="sldImg" idx="2"/>
+          </p:nvPr>
+        </p:nvSpPr>
+        <p:spPr>
+          <a:xfrm>
+            <a:off x="685800" y="1143000"/>
+            <a:ext cx="5486400" cy="3086100"/>
+          </a:xfrm>
+          <a:prstGeom prst="rect">
+            <a:avLst/>
+          </a:prstGeom>
+          <a:noFill/>
+          <a:ln w="12700">
+            <a:solidFill>
+              <a:prstClr val="black"/>
+            </a:solidFill>
+          </a:ln>
+        </p:spPr>
+        <p:txBody>
+          <a:bodyPr vert="horz" lIns="91440" tIns="45720" rIns="91440" bIns="45720" rtlCol="0" anchor="ctr"/>
+          <a:lstStyle/>
+          <a:p>
+            <a:endParaRPr lang="en-US"/>
+          </a:p>
+        </p:txBody>
+      </p:sp>
+      <p:sp>
+        <p:nvSpPr>
+          <p:cNvPr id="5" name="Notes Placeholder 4"/>
+          <p:cNvSpPr>
+            <a:spLocks noGrp="1"/>
+          </p:cNvSpPr>
+          <p:nvPr>
+            <p:ph type="body" sz="quarter" idx="3"/>
+          </p:nvPr>
+        </p:nvSpPr>
+        <p:spPr>
+          <a:xfrm>
+            <a:off x="685800" y="4400550"/>
+            <a:ext cx="5486400" cy="3600450"/>
+          </a:xfrm>
+          <a:prstGeom prst="rect">
+            <a:avLst/>
+          </a:prstGeom>
+        </p:spPr>
+        <p:txBody>
+          <a:bodyPr vert="horz" lIns="91440" tIns="45720" rIns="91440" bIns="45720" rtlCol="0"/>
+          <a:lstStyle/>
+          <a:p>
+            <a:pPr lvl="0"/>
+            <a:r>
+              <a:rPr lang="en-US"/>
+              <a:t>Click to edit Master text styles</a:t>
+            </a:r>
+          </a:p>
+          <a:p>
+            <a:pPr lvl="1"/>
+            <a:r>
+              <a:rPr lang="en-US"/>
+              <a:t>Second level</a:t>
+            </a:r>
+          </a:p>
+          <a:p>
+            <a:pPr lvl="2"/>
+            <a:r>
+              <a:rPr lang="en-US"/>
+              <a:t>Third level</a:t>
+            </a:r>
+          </a:p>
+          <a:p>
+            <a:pPr lvl="3"/>
+            <a:r>
+              <a:rPr lang="en-US"/>
+              <a:t>Fourth level</a:t>
+            </a:r>
+          </a:p>
+          <a:p>
+            <a:pPr lvl="4"/>
+            <a:r>
+              <a:rPr lang="en-US"/>
+              <a:t>Fifth level</a:t>
+            </a:r>
+          </a:p>
+        </p:txBody>
+      </p:sp>
+      <p:sp>
+        <p:nvSpPr>
+          <p:cNvPr id="6" name="Footer Placeholder 5"/>
+          <p:cNvSpPr>
+            <a:spLocks noGrp="1"/>
+          </p:cNvSpPr>
+          <p:nvPr>
+            <p:ph type="ftr" sz="quarter" idx="4"/>
+          </p:nvPr>
+        </p:nvSpPr>
+        <p:spPr>
+          <a:xfrm>
+            <a:off x="0" y="8685213"/>
+            <a:ext cx="2971800" cy="458787"/>
+          </a:xfrm>
+          <a:prstGeom prst="rect">
+            <a:avLst/>
+          </a:prstGeom>
+        </p:spPr>
+        <p:txBody>
+          <a:bodyPr vert="horz" lIns="91440" tIns="45720" rIns="91440" bIns="45720" rtlCol="0" anchor="b"/>
+          <a:lstStyle>
+            <a:lvl1pPr algn="l">
+              <a:defRPr sz="1200"/>
+            </a:lvl1pPr>
+          </a:lstStyle>
+          <a:p>
+            <a:endParaRPr lang="en-US"/>
+          </a:p>
+        </p:txBody>
+      </p:sp>
+      <p:sp>
+        <p:nvSpPr>
+          <p:cNvPr id="7" name="Slide Number Placeholder 6"/>
+          <p:cNvSpPr>
+            <a:spLocks noGrp="1"/>
+          </p:cNvSpPr>
+          <p:nvPr>
+            <p:ph type="sldNum" sz="quarter" idx="5"/>
+          </p:nvPr>
+        </p:nvSpPr>
+        <p:spPr>
+          <a:xfrm>
+            <a:off x="3884613" y="8685213"/>
+            <a:ext cx="2971800" cy="458787"/>
+          </a:xfrm>
+          <a:prstGeom prst="rect">
+            <a:avLst/>
+          </a:prstGeom>
+        </p:spPr>
+        <p:txBody>
+          <a:bodyPr vert="horz" lIns="91440" tIns="45720" rIns="91440" bIns="45720" rtlCol="0" anchor="b"/>
+          <a:lstStyle>
+            <a:lvl1pPr algn="r">
+              <a:defRPr sz="1200"/>
+            </a:lvl1pPr>
+          </a:lstStyle>
+          <a:p>
+            <a:fld id="{677C16E7-616B-4EA5-B3CE-600F8FF71826}" type="slidenum">
+              <a:t>‹#›</a:t>
+            </a:fld>
+            <a:endParaRPr lang="en-US"/>
+          </a:p>
+        </p:txBody>
+      </p:sp>
+    </p:spTree>
+    <p:extLst>
+      <p:ext uri="{BB962C8B-B14F-4D97-AF65-F5344CB8AC3E}">
+        <p14:creationId xmlns:p14="http://schemas.microsoft.com/office/powerpoint/2010/main" val="3194200833"/>
+      </p:ext>
+    </p:extLst>
+  </p:cSld>
+  <p:clrMap bg1="lt1" tx1="dk1" bg2="lt2" tx2="dk2" accent1="accent1" accent2="accent2" accent3="accent3" accent4="accent4" accent5="accent5" accent6="accent6" hlink="hlink" folHlink="folHlink"/>
+  <p:notesStyle>
+    <a:lvl1pPr marL="0" algn="l" defTabSz="914400" rtl="0" eaLnBrk="1" latinLnBrk="0" hangingPunct="1">
+      <a:defRPr sz="1200" kern="1200">
+        <a:solidFill>
+          <a:schemeClr val="tx1"/>
+        </a:solidFill>
+        <a:latin typeface="+mn-lt"/>
+        <a:ea typeface="+mn-ea"/>
+        <a:cs typeface="+mn-cs"/>
+      </a:defRPr>
+    </a:lvl1pPr>
+    <a:lvl2pPr marL="457200" algn="l" defTabSz="914400" rtl="0" eaLnBrk="1" latinLnBrk="0" hangingPunct="1">
+      <a:defRPr sz="1200" kern="1200">
+        <a:solidFill>
+          <a:schemeClr val="tx1"/>
+        </a:solidFill>
+        <a:latin typeface="+mn-lt"/>
+        <a:ea typeface="+mn-ea"/>
+        <a:cs typeface="+mn-cs"/>
+      </a:defRPr>
+    </a:lvl2pPr>
+    <a:lvl3pPr marL="914400" algn="l" defTabSz="914400" rtl="0" eaLnBrk="1" latinLnBrk="0" hangingPunct="1">
+      <a:defRPr sz="1200" kern="1200">
+        <a:solidFill>
+          <a:schemeClr val="tx1"/>
+        </a:solidFill>
+        <a:latin typeface="+mn-lt"/>
+        <a:ea typeface="+mn-ea"/>
+        <a:cs typeface="+mn-cs"/>
+      </a:defRPr>
+    </a:lvl3pPr>
+    <a:lvl4pPr marL="1371600" algn="l" defTabSz="914400" rtl="0" eaLnBrk="1" latinLnBrk="0" hangingPunct="1">
+      <a:defRPr sz="1200" kern="1200">
+        <a:solidFill>
+          <a:schemeClr val="tx1"/>
+        </a:solidFill>
+        <a:latin typeface="+mn-lt"/>
+        <a:ea typeface="+mn-ea"/>
+        <a:cs typeface="+mn-cs"/>
+      </a:defRPr>
+    </a:lvl4pPr>
+    <a:lvl5pPr marL="1828800" algn="l" defTabSz="914400" rtl="0" eaLnBrk="1" latinLnBrk="0" hangingPunct="1">
+      <a:defRPr sz="1200" kern="1200">
+        <a:solidFill>
+          <a:schemeClr val="tx1"/>
+        </a:solidFill>
+        <a:latin typeface="+mn-lt"/>
+        <a:ea typeface="+mn-ea"/>
+        <a:cs typeface="+mn-cs"/>
+      </a:defRPr>
+    </a:lvl5pPr>
+    <a:lvl6pPr marL="2286000" algn="l" defTabSz="914400" rtl="0" eaLnBrk="1" latinLnBrk="0" hangingPunct="1">
+      <a:defRPr sz="1200" kern="1200">
+        <a:solidFill>
+          <a:schemeClr val="tx1"/>
+        </a:solidFill>
+        <a:latin typeface="+mn-lt"/>
+        <a:ea typeface="+mn-ea"/>
+        <a:cs typeface="+mn-cs"/>
+      </a:defRPr>
+    </a:lvl6pPr>
+    <a:lvl7pPr marL="2743200" algn="l" defTabSz="914400" rtl="0" eaLnBrk="1" latinLnBrk="0" hangingPunct="1">
+      <a:defRPr sz="1200" kern="1200">
+        <a:solidFill>
+          <a:schemeClr val="tx1"/>
+        </a:solidFill>
+        <a:latin typeface="+mn-lt"/>
+        <a:ea typeface="+mn-ea"/>
+        <a:cs typeface="+mn-cs"/>
+      </a:defRPr>
+    </a:lvl7pPr>
+    <a:lvl8pPr marL="3200400" algn="l" defTabSz="914400" rtl="0" eaLnBrk="1" latinLnBrk="0" hangingPunct="1">
+      <a:defRPr sz="1200" kern="1200">
+        <a:solidFill>
+          <a:schemeClr val="tx1"/>
+        </a:solidFill>
+        <a:latin typeface="+mn-lt"/>
+        <a:ea typeface="+mn-ea"/>
+        <a:cs typeface="+mn-cs"/>
+      </a:defRPr>
+    </a:lvl8pPr>
+    <a:lvl9pPr marL="3657600" algn="l" defTabSz="914400" rtl="0" eaLnBrk="1" latinLnBrk="0" hangingPunct="1">
+      <a:defRPr sz="1200" kern="1200">
+        <a:solidFill>
+          <a:schemeClr val="tx1"/>
+        </a:solidFill>
+        <a:latin typeface="+mn-lt"/>
+        <a:ea typeface="+mn-ea"/>
+        <a:cs typeface="+mn-cs"/>
+      </a:defRPr>
+    </a:lvl9pPr>
+  </p:notesStyle>
+</p:notesMaster>
+</file>
+
+<file path=ppt/notesSlides/notesSlide1.xml><?xml version="1.0" encoding="utf-8"?>
+<p:notes xmlns:a="http://schemas.openxmlformats.org/drawingml/2006/main" xmlns:r="http://schemas.openxmlformats.org/officeDocument/2006/relationships" xmlns:p="http://schemas.openxmlformats.org/presentationml/2006/main">
+  <p:cSld>
+    <p:spTree>
+      <p:nvGrpSpPr>
+        <p:cNvPr id="1" name=""/>
+        <p:cNvGrpSpPr/>
+        <p:nvPr/>
+      </p:nvGrpSpPr>
+      <p:grpSpPr>
+        <a:xfrm>
+          <a:off x="0" y="0"/>
+          <a:ext cx="0" cy="0"/>
+          <a:chOff x="0" y="0"/>
+          <a:chExt cx="0" cy="0"/>
+        </a:xfrm>
+      </p:grpSpPr>
+      <p:sp>
+        <p:nvSpPr>
+          <p:cNvPr id="2" name="Slide Image Placeholder 1"/>
+          <p:cNvSpPr>
+            <a:spLocks noGrp="1" noRot="1" noChangeAspect="1"/>
+          </p:cNvSpPr>
+          <p:nvPr>
+            <p:ph type="sldImg"/>
+          </p:nvPr>
+        </p:nvSpPr>
+        <p:spPr/>
+      </p:sp>
+      <p:sp>
+        <p:nvSpPr>
+          <p:cNvPr id="3" name="Notes Placeholder 2"/>
+          <p:cNvSpPr>
+            <a:spLocks noGrp="1"/>
+          </p:cNvSpPr>
+          <p:nvPr>
+            <p:ph type="body" idx="1"/>
+          </p:nvPr>
+        </p:nvSpPr>
+        <p:spPr/>
+        <p:txBody>
+          <a:bodyPr/>
+          <a:lstStyle/>
+          <a:p>
+            <a:r>
+              <a:rPr lang="en-US" dirty="0">
+                <a:ea typeface="Calibri"/>
+                <a:cs typeface="Calibri"/>
+              </a:rPr>
+              <a:t>Redis session </a:t>
+            </a:r>
+            <a:r>
+              <a:rPr lang="en-US" dirty="0" err="1">
+                <a:ea typeface="Calibri"/>
+                <a:cs typeface="Calibri"/>
+              </a:rPr>
+              <a:t>kezeles</a:t>
+            </a:r>
+            <a:r>
+              <a:rPr lang="en-US" dirty="0">
+                <a:ea typeface="Calibri"/>
+                <a:cs typeface="Calibri"/>
+              </a:rPr>
+              <a:t>: pl </a:t>
+            </a:r>
+            <a:r>
+              <a:rPr lang="en-US" dirty="0" err="1"/>
+              <a:t>kosar</a:t>
+            </a:r>
+            <a:r>
+              <a:rPr lang="en-US" dirty="0"/>
+              <a:t> </a:t>
+            </a:r>
+            <a:r>
+              <a:rPr lang="en-US" dirty="0" err="1"/>
+              <a:t>tartalma</a:t>
+            </a:r>
+            <a:r>
+              <a:rPr lang="en-US" dirty="0"/>
+              <a:t> </a:t>
+            </a:r>
+            <a:r>
+              <a:rPr lang="en-US" dirty="0" err="1"/>
+              <a:t>webshopnal</a:t>
+            </a:r>
+            <a:r>
+              <a:rPr lang="en-US" dirty="0"/>
+              <a:t>, </a:t>
+            </a:r>
+            <a:r>
+              <a:rPr lang="en-US" dirty="0" err="1"/>
+              <a:t>az</a:t>
+            </a:r>
+            <a:r>
+              <a:rPr lang="en-US" dirty="0"/>
+              <a:t> </a:t>
+            </a:r>
+            <a:r>
+              <a:rPr lang="en-US" dirty="0" err="1"/>
+              <a:t>adatokat</a:t>
+            </a:r>
+            <a:r>
+              <a:rPr lang="en-US" dirty="0"/>
+              <a:t> </a:t>
+            </a:r>
+            <a:r>
+              <a:rPr lang="en-US" dirty="0" err="1"/>
+              <a:t>redisben</a:t>
+            </a:r>
+            <a:r>
+              <a:rPr lang="en-US" dirty="0"/>
+              <a:t> </a:t>
+            </a:r>
+            <a:r>
+              <a:rPr lang="en-US" dirty="0" err="1"/>
+              <a:t>taroljuk</a:t>
+            </a:r>
+            <a:r>
+              <a:rPr lang="en-US" dirty="0"/>
+              <a:t> </a:t>
+            </a:r>
+            <a:r>
+              <a:rPr lang="en-US" dirty="0" err="1"/>
+              <a:t>kulcs-ertek</a:t>
+            </a:r>
+            <a:r>
+              <a:rPr lang="en-US" dirty="0"/>
+              <a:t> </a:t>
+            </a:r>
+            <a:r>
+              <a:rPr lang="en-US" dirty="0" err="1"/>
+              <a:t>formaban</a:t>
+            </a:r>
+            <a:endParaRPr lang="en-US" dirty="0" err="1">
+              <a:ea typeface="Calibri"/>
+              <a:cs typeface="Calibri"/>
+            </a:endParaRPr>
+          </a:p>
+        </p:txBody>
+      </p:sp>
+      <p:sp>
+        <p:nvSpPr>
+          <p:cNvPr id="4" name="Slide Number Placeholder 3"/>
+          <p:cNvSpPr>
+            <a:spLocks noGrp="1"/>
+          </p:cNvSpPr>
+          <p:nvPr>
+            <p:ph type="sldNum" sz="quarter" idx="5"/>
+          </p:nvPr>
+        </p:nvSpPr>
+        <p:spPr/>
+        <p:txBody>
+          <a:bodyPr/>
+          <a:lstStyle/>
+          <a:p>
+            <a:fld id="{677C16E7-616B-4EA5-B3CE-600F8FF71826}" type="slidenum">
+              <a:t>6</a:t>
+            </a:fld>
+            <a:endParaRPr lang="en-US"/>
+          </a:p>
+        </p:txBody>
+      </p:sp>
+    </p:spTree>
+    <p:extLst>
+      <p:ext uri="{BB962C8B-B14F-4D97-AF65-F5344CB8AC3E}">
+        <p14:creationId xmlns:p14="http://schemas.microsoft.com/office/powerpoint/2010/main" val="2672188538"/>
+      </p:ext>
+    </p:extLst>
+  </p:cSld>
+  <p:clrMapOvr>
+    <a:masterClrMapping/>
+  </p:clrMapOvr>
+</p:notes>
+</file>
+
+<file path=ppt/notesSlides/notesSlide2.xml><?xml version="1.0" encoding="utf-8"?>
+<p:notes xmlns:a="http://schemas.openxmlformats.org/drawingml/2006/main" xmlns:r="http://schemas.openxmlformats.org/officeDocument/2006/relationships" xmlns:p="http://schemas.openxmlformats.org/presentationml/2006/main">
+  <p:cSld>
+    <p:spTree>
+      <p:nvGrpSpPr>
+        <p:cNvPr id="1" name=""/>
+        <p:cNvGrpSpPr/>
+        <p:nvPr/>
+      </p:nvGrpSpPr>
+      <p:grpSpPr>
+        <a:xfrm>
+          <a:off x="0" y="0"/>
+          <a:ext cx="0" cy="0"/>
+          <a:chOff x="0" y="0"/>
+          <a:chExt cx="0" cy="0"/>
+        </a:xfrm>
+      </p:grpSpPr>
+      <p:sp>
+        <p:nvSpPr>
+          <p:cNvPr id="2" name="Slide Image Placeholder 1"/>
+          <p:cNvSpPr>
+            <a:spLocks noGrp="1" noRot="1" noChangeAspect="1"/>
+          </p:cNvSpPr>
+          <p:nvPr>
+            <p:ph type="sldImg"/>
+          </p:nvPr>
+        </p:nvSpPr>
+        <p:spPr/>
+      </p:sp>
+      <p:sp>
+        <p:nvSpPr>
+          <p:cNvPr id="3" name="Notes Placeholder 2"/>
+          <p:cNvSpPr>
+            <a:spLocks noGrp="1"/>
+          </p:cNvSpPr>
+          <p:nvPr>
+            <p:ph type="body" idx="1"/>
+          </p:nvPr>
+        </p:nvSpPr>
+        <p:spPr/>
+        <p:txBody>
+          <a:bodyPr/>
+          <a:lstStyle/>
+          <a:p>
+            <a:r>
+              <a:rPr lang="en-US" dirty="0"/>
+              <a:t>Apache Lucene </a:t>
+            </a:r>
+            <a:r>
+              <a:rPr lang="en-US" dirty="0" err="1"/>
+              <a:t>javaban</a:t>
+            </a:r>
+            <a:r>
+              <a:rPr lang="en-US" dirty="0"/>
+              <a:t> </a:t>
+            </a:r>
+            <a:r>
+              <a:rPr lang="en-US" dirty="0" err="1"/>
+              <a:t>írt</a:t>
+            </a:r>
+            <a:r>
+              <a:rPr lang="en-US" dirty="0"/>
+              <a:t> Full-text search </a:t>
+            </a:r>
+            <a:r>
+              <a:rPr lang="en-US" dirty="0" err="1"/>
+              <a:t>ami</a:t>
+            </a:r>
+            <a:r>
+              <a:rPr lang="en-US" dirty="0"/>
+              <a:t> </a:t>
+            </a:r>
+            <a:r>
+              <a:rPr lang="en-US" dirty="0" err="1"/>
+              <a:t>egyebkent</a:t>
+            </a:r>
+            <a:r>
+              <a:rPr lang="en-US" dirty="0"/>
+              <a:t> open source</a:t>
+            </a:r>
+            <a:endParaRPr lang="en-US" dirty="0">
+              <a:ea typeface="Calibri" panose="020F0502020204030204"/>
+              <a:cs typeface="Calibri" panose="020F0502020204030204"/>
+            </a:endParaRPr>
+          </a:p>
+          <a:p>
+            <a:r>
+              <a:rPr lang="en-US" dirty="0" err="1"/>
+              <a:t>közel</a:t>
+            </a:r>
+            <a:r>
+              <a:rPr lang="en-US" dirty="0"/>
+              <a:t> </a:t>
+            </a:r>
+            <a:r>
+              <a:rPr lang="en-US" dirty="0" err="1"/>
+              <a:t>valós</a:t>
+            </a:r>
+            <a:r>
+              <a:rPr lang="en-US" dirty="0"/>
+              <a:t> </a:t>
+            </a:r>
+            <a:r>
+              <a:rPr lang="en-US" dirty="0" err="1"/>
+              <a:t>idejű</a:t>
+            </a:r>
+            <a:r>
+              <a:rPr lang="en-US" dirty="0"/>
+              <a:t> </a:t>
+            </a:r>
+            <a:r>
+              <a:rPr lang="en-US" dirty="0" err="1"/>
+              <a:t>működés</a:t>
+            </a:r>
+            <a:r>
+              <a:rPr lang="en-US" dirty="0"/>
+              <a:t> </a:t>
+            </a:r>
+            <a:r>
+              <a:rPr lang="en-US" dirty="0" err="1"/>
+              <a:t>mivel</a:t>
+            </a:r>
+            <a:r>
+              <a:rPr lang="en-US" dirty="0"/>
+              <a:t> </a:t>
+            </a:r>
+            <a:r>
+              <a:rPr lang="en-US" dirty="0" err="1"/>
+              <a:t>memoriaban</a:t>
+            </a:r>
+            <a:r>
+              <a:rPr lang="en-US" dirty="0"/>
+              <a:t> van </a:t>
+            </a:r>
+            <a:r>
+              <a:rPr lang="en-US" dirty="0" err="1"/>
+              <a:t>nem</a:t>
+            </a:r>
+            <a:r>
+              <a:rPr lang="en-US" dirty="0"/>
+              <a:t> </a:t>
+            </a:r>
+            <a:r>
+              <a:rPr lang="en-US" dirty="0" err="1"/>
+              <a:t>adatbazisban</a:t>
+            </a:r>
+            <a:endParaRPr lang="en-US">
+              <a:ea typeface="Calibri"/>
+              <a:cs typeface="Calibri"/>
+            </a:endParaRPr>
+          </a:p>
+          <a:p>
+            <a:r>
+              <a:rPr lang="en-US" dirty="0">
+                <a:ea typeface="Calibri"/>
+                <a:cs typeface="Calibri"/>
+              </a:rPr>
+              <a:t>Acid: </a:t>
+            </a:r>
+            <a:r>
+              <a:rPr lang="en-US" dirty="0" err="1">
+                <a:ea typeface="Calibri"/>
+                <a:cs typeface="Calibri"/>
+              </a:rPr>
+              <a:t>sql</a:t>
+            </a:r>
+          </a:p>
+        </p:txBody>
+      </p:sp>
+      <p:sp>
+        <p:nvSpPr>
+          <p:cNvPr id="4" name="Slide Number Placeholder 3"/>
+          <p:cNvSpPr>
+            <a:spLocks noGrp="1"/>
+          </p:cNvSpPr>
+          <p:nvPr>
+            <p:ph type="sldNum" sz="quarter" idx="5"/>
+          </p:nvPr>
+        </p:nvSpPr>
+        <p:spPr/>
+        <p:txBody>
+          <a:bodyPr/>
+          <a:lstStyle/>
+          <a:p>
+            <a:fld id="{677C16E7-616B-4EA5-B3CE-600F8FF71826}" type="slidenum">
+              <a:t>7</a:t>
+            </a:fld>
+            <a:endParaRPr lang="en-US"/>
+          </a:p>
+        </p:txBody>
+      </p:sp>
+    </p:spTree>
+    <p:extLst>
+      <p:ext uri="{BB962C8B-B14F-4D97-AF65-F5344CB8AC3E}">
+        <p14:creationId xmlns:p14="http://schemas.microsoft.com/office/powerpoint/2010/main" val="286438415"/>
+      </p:ext>
+    </p:extLst>
+  </p:cSld>
+  <p:clrMapOvr>
+    <a:masterClrMapping/>
+  </p:clrMapOvr>
+</p:notes>
+</file>
+
+<file path=ppt/notesSlides/notesSlide3.xml><?xml version="1.0" encoding="utf-8"?>
+<p:notes xmlns:a="http://schemas.openxmlformats.org/drawingml/2006/main" xmlns:r="http://schemas.openxmlformats.org/officeDocument/2006/relationships" xmlns:p="http://schemas.openxmlformats.org/presentationml/2006/main">
+  <p:cSld>
+    <p:spTree>
+      <p:nvGrpSpPr>
+        <p:cNvPr id="1" name=""/>
+        <p:cNvGrpSpPr/>
+        <p:nvPr/>
+      </p:nvGrpSpPr>
+      <p:grpSpPr>
+        <a:xfrm>
+          <a:off x="0" y="0"/>
+          <a:ext cx="0" cy="0"/>
+          <a:chOff x="0" y="0"/>
+          <a:chExt cx="0" cy="0"/>
+        </a:xfrm>
+      </p:grpSpPr>
+      <p:sp>
+        <p:nvSpPr>
+          <p:cNvPr id="2" name="Slide Image Placeholder 1"/>
+          <p:cNvSpPr>
+            <a:spLocks noGrp="1" noRot="1" noChangeAspect="1"/>
+          </p:cNvSpPr>
+          <p:nvPr>
+            <p:ph type="sldImg"/>
+          </p:nvPr>
+        </p:nvSpPr>
+        <p:spPr/>
+      </p:sp>
+      <p:sp>
+        <p:nvSpPr>
+          <p:cNvPr id="3" name="Notes Placeholder 2"/>
+          <p:cNvSpPr>
+            <a:spLocks noGrp="1"/>
+          </p:cNvSpPr>
+          <p:nvPr>
+            <p:ph type="body" idx="1"/>
+          </p:nvPr>
+        </p:nvSpPr>
+        <p:spPr/>
+        <p:txBody>
+          <a:bodyPr/>
+          <a:lstStyle/>
+          <a:p>
+            <a:r>
+              <a:rPr lang="en-US" dirty="0">
+                <a:ea typeface="Calibri"/>
+                <a:cs typeface="Calibri"/>
+              </a:rPr>
+              <a:t>SQL: ha </a:t>
+            </a:r>
+            <a:r>
+              <a:rPr lang="en-US" dirty="0" err="1">
+                <a:ea typeface="Calibri"/>
+                <a:cs typeface="Calibri"/>
+              </a:rPr>
+              <a:t>megbizhato</a:t>
+            </a:r>
+            <a:r>
+              <a:rPr lang="en-US" dirty="0">
+                <a:ea typeface="Calibri"/>
+                <a:cs typeface="Calibri"/>
+              </a:rPr>
+              <a:t> </a:t>
+            </a:r>
+            <a:r>
+              <a:rPr lang="en-US" dirty="0" err="1">
+                <a:ea typeface="Calibri"/>
+                <a:cs typeface="Calibri"/>
+              </a:rPr>
+              <a:t>adatbazis</a:t>
+            </a:r>
+            <a:r>
+              <a:rPr lang="en-US" dirty="0">
+                <a:ea typeface="Calibri"/>
+                <a:cs typeface="Calibri"/>
+              </a:rPr>
+              <a:t> </a:t>
+            </a:r>
+            <a:r>
+              <a:rPr lang="en-US" dirty="0" err="1">
+                <a:ea typeface="Calibri"/>
+                <a:cs typeface="Calibri"/>
+              </a:rPr>
+              <a:t>kell</a:t>
+            </a:r>
+            <a:r>
+              <a:rPr lang="en-US" dirty="0">
+                <a:ea typeface="Calibri"/>
+                <a:cs typeface="Calibri"/>
+              </a:rPr>
+              <a:t> pl </a:t>
+            </a:r>
+            <a:r>
+              <a:rPr lang="en-US" dirty="0" err="1">
+                <a:ea typeface="Calibri"/>
+                <a:cs typeface="Calibri"/>
+              </a:rPr>
+              <a:t>banki</a:t>
+            </a:r>
+            <a:endParaRPr lang="en-US" dirty="0">
+              <a:ea typeface="Calibri"/>
+              <a:cs typeface="Calibri"/>
+            </a:endParaRPr>
+          </a:p>
+          <a:p>
+            <a:r>
+              <a:rPr lang="en-US" dirty="0">
+                <a:ea typeface="Calibri"/>
+                <a:cs typeface="Calibri"/>
+              </a:rPr>
+              <a:t>NOSQL: ha </a:t>
+            </a:r>
+            <a:r>
+              <a:rPr lang="en-US" dirty="0" err="1">
+                <a:ea typeface="Calibri"/>
+                <a:cs typeface="Calibri"/>
+              </a:rPr>
+              <a:t>nagyon</a:t>
+            </a:r>
+            <a:r>
+              <a:rPr lang="en-US" dirty="0">
+                <a:ea typeface="Calibri"/>
+                <a:cs typeface="Calibri"/>
+              </a:rPr>
+              <a:t> </a:t>
+            </a:r>
+            <a:r>
+              <a:rPr lang="en-US" dirty="0" err="1">
+                <a:ea typeface="Calibri"/>
+                <a:cs typeface="Calibri"/>
+              </a:rPr>
+              <a:t>nagy</a:t>
+            </a:r>
+            <a:r>
+              <a:rPr lang="en-US" dirty="0">
+                <a:ea typeface="Calibri"/>
+                <a:cs typeface="Calibri"/>
+              </a:rPr>
+              <a:t> </a:t>
+            </a:r>
+            <a:r>
+              <a:rPr lang="en-US" dirty="0" err="1">
+                <a:ea typeface="Calibri"/>
+                <a:cs typeface="Calibri"/>
+              </a:rPr>
+              <a:t>adatbazisban</a:t>
+            </a:r>
+            <a:r>
+              <a:rPr lang="en-US" dirty="0">
+                <a:ea typeface="Calibri"/>
+                <a:cs typeface="Calibri"/>
+              </a:rPr>
+              <a:t> </a:t>
+            </a:r>
+            <a:r>
+              <a:rPr lang="en-US" dirty="0" err="1">
+                <a:ea typeface="Calibri"/>
+                <a:cs typeface="Calibri"/>
+              </a:rPr>
+              <a:t>kell</a:t>
+            </a:r>
+            <a:r>
+              <a:rPr lang="en-US" dirty="0">
+                <a:ea typeface="Calibri"/>
+                <a:cs typeface="Calibri"/>
+              </a:rPr>
+              <a:t> </a:t>
+            </a:r>
+            <a:r>
+              <a:rPr lang="en-US" dirty="0" err="1">
+                <a:ea typeface="Calibri"/>
+                <a:cs typeface="Calibri"/>
+              </a:rPr>
+              <a:t>gyorsan</a:t>
+            </a:r>
+            <a:r>
+              <a:rPr lang="en-US" dirty="0">
+                <a:ea typeface="Calibri"/>
+                <a:cs typeface="Calibri"/>
+              </a:rPr>
+              <a:t> </a:t>
+            </a:r>
+            <a:r>
+              <a:rPr lang="en-US" dirty="0" err="1">
+                <a:ea typeface="Calibri"/>
+                <a:cs typeface="Calibri"/>
+              </a:rPr>
+              <a:t>keresni</a:t>
+            </a:r>
+          </a:p>
+        </p:txBody>
+      </p:sp>
+      <p:sp>
+        <p:nvSpPr>
+          <p:cNvPr id="4" name="Slide Number Placeholder 3"/>
+          <p:cNvSpPr>
+            <a:spLocks noGrp="1"/>
+          </p:cNvSpPr>
+          <p:nvPr>
+            <p:ph type="sldNum" sz="quarter" idx="5"/>
+          </p:nvPr>
+        </p:nvSpPr>
+        <p:spPr/>
+        <p:txBody>
+          <a:bodyPr/>
+          <a:lstStyle/>
+          <a:p>
+            <a:fld id="{677C16E7-616B-4EA5-B3CE-600F8FF71826}" type="slidenum">
+              <a:t>8</a:t>
+            </a:fld>
+            <a:endParaRPr lang="en-US"/>
+          </a:p>
+        </p:txBody>
+      </p:sp>
+    </p:spTree>
+    <p:extLst>
+      <p:ext uri="{BB962C8B-B14F-4D97-AF65-F5344CB8AC3E}">
+        <p14:creationId xmlns:p14="http://schemas.microsoft.com/office/powerpoint/2010/main" val="4273135115"/>
+      </p:ext>
+    </p:extLst>
+  </p:cSld>
+  <p:clrMapOvr>
+    <a:masterClrMapping/>
+  </p:clrMapOvr>
+</p:notes>
 </file>
 
 <file path=ppt/slideLayouts/slideLayout1.xml><?xml version="1.0" encoding="utf-8"?>
@@ -282,7 +1378,7 @@
           <a:p>
             <a:fld id="{02AC24A9-CCB6-4F8D-B8DB-C2F3692CFA5A}" type="datetimeFigureOut">
               <a:rPr lang="en-US" smtClean="0"/>
-              <a:t>4/13/2026</a:t>
+              <a:t>4/15/2026</a:t>
             </a:fld>
             <a:endParaRPr lang="en-US" dirty="0"/>
           </a:p>
@@ -652,7 +1748,7 @@
           <a:p>
             <a:fld id="{02AC24A9-CCB6-4F8D-B8DB-C2F3692CFA5A}" type="datetimeFigureOut">
               <a:rPr lang="en-US" smtClean="0"/>
-              <a:t>4/13/2026</a:t>
+              <a:t>4/15/2026</a:t>
             </a:fld>
             <a:endParaRPr lang="en-US"/>
           </a:p>
@@ -861,7 +1957,7 @@
           <a:p>
             <a:fld id="{02AC24A9-CCB6-4F8D-B8DB-C2F3692CFA5A}" type="datetimeFigureOut">
               <a:rPr lang="en-US" smtClean="0"/>
-              <a:t>4/13/2026</a:t>
+              <a:t>4/15/2026</a:t>
             </a:fld>
             <a:endParaRPr lang="en-US"/>
           </a:p>
@@ -1331,7 +2427,7 @@
           <a:p>
             <a:fld id="{02AC24A9-CCB6-4F8D-B8DB-C2F3692CFA5A}" type="datetimeFigureOut">
               <a:rPr lang="en-US" smtClean="0"/>
-              <a:t>4/13/2026</a:t>
+              <a:t>4/15/2026</a:t>
             </a:fld>
             <a:endParaRPr lang="en-US"/>
           </a:p>
@@ -1785,7 +2881,7 @@
           <a:p>
             <a:fld id="{02AC24A9-CCB6-4F8D-B8DB-C2F3692CFA5A}" type="datetimeFigureOut">
               <a:rPr lang="en-US" smtClean="0"/>
-              <a:t>4/13/2026</a:t>
+              <a:t>4/15/2026</a:t>
             </a:fld>
             <a:endParaRPr lang="en-US"/>
           </a:p>
@@ -2317,7 +3413,7 @@
           <a:p>
             <a:fld id="{02AC24A9-CCB6-4F8D-B8DB-C2F3692CFA5A}" type="datetimeFigureOut">
               <a:rPr lang="en-US" smtClean="0"/>
-              <a:t>4/13/2026</a:t>
+              <a:t>4/15/2026</a:t>
             </a:fld>
             <a:endParaRPr lang="en-US"/>
           </a:p>
@@ -3016,7 +4112,7 @@
           <a:p>
             <a:fld id="{02AC24A9-CCB6-4F8D-B8DB-C2F3692CFA5A}" type="datetimeFigureOut">
               <a:rPr lang="en-US" smtClean="0"/>
-              <a:t>4/13/2026</a:t>
+              <a:t>4/15/2026</a:t>
             </a:fld>
             <a:endParaRPr lang="en-US"/>
           </a:p>
@@ -3345,7 +4441,7 @@
           <a:p>
             <a:fld id="{02AC24A9-CCB6-4F8D-B8DB-C2F3692CFA5A}" type="datetimeFigureOut">
               <a:rPr lang="en-US" smtClean="0"/>
-              <a:t>4/13/2026</a:t>
+              <a:t>4/15/2026</a:t>
             </a:fld>
             <a:endParaRPr lang="en-US"/>
           </a:p>
@@ -3458,7 +4554,7 @@
           <a:p>
             <a:fld id="{02AC24A9-CCB6-4F8D-B8DB-C2F3692CFA5A}" type="datetimeFigureOut">
               <a:rPr lang="en-US" smtClean="0"/>
-              <a:t>4/13/2026</a:t>
+              <a:t>4/15/2026</a:t>
             </a:fld>
             <a:endParaRPr lang="en-US"/>
           </a:p>
@@ -3953,7 +5049,7 @@
           <a:p>
             <a:fld id="{02AC24A9-CCB6-4F8D-B8DB-C2F3692CFA5A}" type="datetimeFigureOut">
               <a:rPr lang="en-US" smtClean="0"/>
-              <a:t>4/13/2026</a:t>
+              <a:t>4/15/2026</a:t>
             </a:fld>
             <a:endParaRPr lang="en-US" dirty="0"/>
           </a:p>
@@ -4430,7 +5526,7 @@
           <a:p>
             <a:fld id="{02AC24A9-CCB6-4F8D-B8DB-C2F3692CFA5A}" type="datetimeFigureOut">
               <a:rPr lang="en-US" smtClean="0"/>
-              <a:t>4/13/2026</a:t>
+              <a:t>4/15/2026</a:t>
             </a:fld>
             <a:endParaRPr lang="en-US"/>
           </a:p>
@@ -4673,7 +5769,7 @@
           <a:p>
             <a:fld id="{02AC24A9-CCB6-4F8D-B8DB-C2F3692CFA5A}" type="datetimeFigureOut">
               <a:rPr lang="en-US" smtClean="0"/>
-              <a:t>4/13/2026</a:t>
+              <a:t>4/15/2026</a:t>
             </a:fld>
             <a:endParaRPr lang="en-US"/>
           </a:p>
@@ -5781,7 +6877,7 @@
         </p:nvSpPr>
         <p:spPr>
           <a:xfrm>
-            <a:off x="529414" y="1882101"/>
+            <a:off x="521025" y="2259606"/>
             <a:ext cx="10168128" cy="3694176"/>
           </a:xfrm>
         </p:spPr>
@@ -5818,10 +6914,10 @@
               <a:rPr lang="en-GB" dirty="0" err="1"/>
               <a:t>szabályrendszere</a:t>
             </a:r>
-            <a:endParaRPr lang="en-GB"/>
-          </a:p>
-          <a:p>
-            <a:endParaRPr lang="en-GB"/>
+            <a:endParaRPr lang="en-GB" dirty="0"/>
+          </a:p>
+          <a:p>
+            <a:endParaRPr lang="en-GB" dirty="0"/>
           </a:p>
           <a:p>
             <a:r>
@@ -6152,16 +7248,123 @@
             </a:r>
             <a:r>
               <a:rPr lang="en-GB" dirty="0"/>
-              <a:t>: </a:t>
-            </a:r>
-            <a:r>
-              <a:rPr lang="en-GB" i="1" dirty="0"/>
-              <a:t>MongoDB</a:t>
-            </a:r>
-            <a:r>
-              <a:rPr lang="en-GB" dirty="0"/>
-              <a:t>, Firebase</a:t>
-            </a:r>
+              <a:t>: MongoDB, Redis</a:t>
+            </a:r>
+          </a:p>
+        </p:txBody>
+      </p:sp>
+      <p:sp>
+        <p:nvSpPr>
+          <p:cNvPr id="4" name="TextBox 3">
+            <a:extLst>
+              <a:ext uri="{FF2B5EF4-FFF2-40B4-BE49-F238E27FC236}">
+                <a16:creationId xmlns:a16="http://schemas.microsoft.com/office/drawing/2014/main" id="{3492A3B8-F27A-CC6E-10E4-9ED796C95714}"/>
+              </a:ext>
+            </a:extLst>
+          </p:cNvPr>
+          <p:cNvSpPr txBox="1"/>
+          <p:nvPr/>
+        </p:nvSpPr>
+        <p:spPr>
+          <a:xfrm>
+            <a:off x="1117763" y="5008358"/>
+            <a:ext cx="6859627" cy="523220"/>
+          </a:xfrm>
+          <a:prstGeom prst="rect">
+            <a:avLst/>
+          </a:prstGeom>
+          <a:noFill/>
+        </p:spPr>
+        <p:txBody>
+          <a:bodyPr rot="0" spcFirstLastPara="0" vertOverflow="overflow" horzOverflow="overflow" vert="horz" wrap="square" lIns="91440" tIns="45720" rIns="91440" bIns="45720" numCol="1" spcCol="0" rtlCol="0" fromWordArt="0" anchor="t" anchorCtr="0" forceAA="0" compatLnSpc="1">
+            <a:prstTxWarp prst="textNoShape">
+              <a:avLst/>
+            </a:prstTxWarp>
+            <a:spAutoFit/>
+          </a:bodyPr>
+          <a:lstStyle/>
+          <a:p>
+            <a:r>
+              <a:rPr lang="en-US" sz="1400" dirty="0">
+                <a:ea typeface="+mn-lt"/>
+                <a:cs typeface="+mn-lt"/>
+              </a:rPr>
+              <a:t>MongoDB – </a:t>
+            </a:r>
+            <a:r>
+              <a:rPr lang="en-US" sz="1400" dirty="0" err="1">
+                <a:ea typeface="+mn-lt"/>
+                <a:cs typeface="+mn-lt"/>
+              </a:rPr>
+              <a:t>dokumentum</a:t>
+            </a:r>
+            <a:r>
+              <a:rPr lang="en-US" sz="1400" dirty="0">
+                <a:ea typeface="+mn-lt"/>
+                <a:cs typeface="+mn-lt"/>
+              </a:rPr>
+              <a:t> </a:t>
+            </a:r>
+            <a:r>
+              <a:rPr lang="en-US" sz="1400" dirty="0" err="1">
+                <a:ea typeface="+mn-lt"/>
+                <a:cs typeface="+mn-lt"/>
+              </a:rPr>
+              <a:t>alapú</a:t>
+            </a:r>
+            <a:r>
+              <a:rPr lang="en-US" sz="1400" dirty="0">
+                <a:ea typeface="+mn-lt"/>
+                <a:cs typeface="+mn-lt"/>
+              </a:rPr>
+              <a:t> </a:t>
+            </a:r>
+            <a:r>
+              <a:rPr lang="en-US" sz="1400" dirty="0" err="1">
+                <a:ea typeface="+mn-lt"/>
+                <a:cs typeface="+mn-lt"/>
+              </a:rPr>
+              <a:t>adatbázis</a:t>
+            </a:r>
+            <a:r>
+              <a:rPr lang="en-US" sz="1400" dirty="0">
+                <a:ea typeface="+mn-lt"/>
+                <a:cs typeface="+mn-lt"/>
+              </a:rPr>
+              <a:t> (JSON-</a:t>
+            </a:r>
+            <a:r>
+              <a:rPr lang="en-US" sz="1400" dirty="0" err="1">
+                <a:ea typeface="+mn-lt"/>
+                <a:cs typeface="+mn-lt"/>
+              </a:rPr>
+              <a:t>szerű</a:t>
+            </a:r>
+            <a:r>
+              <a:rPr lang="en-US" sz="1400" dirty="0">
+                <a:ea typeface="+mn-lt"/>
+                <a:cs typeface="+mn-lt"/>
+              </a:rPr>
+              <a:t> </a:t>
+            </a:r>
+            <a:r>
+              <a:rPr lang="en-US" sz="1400" dirty="0" err="1">
+                <a:ea typeface="+mn-lt"/>
+                <a:cs typeface="+mn-lt"/>
+              </a:rPr>
+              <a:t>adatok</a:t>
+            </a:r>
+            <a:r>
+              <a:rPr lang="en-US" sz="1400" dirty="0">
+                <a:ea typeface="+mn-lt"/>
+                <a:cs typeface="+mn-lt"/>
+              </a:rPr>
+              <a:t>) </a:t>
+            </a:r>
+            <a:endParaRPr lang="en-US" sz="1400" dirty="0"/>
+          </a:p>
+          <a:p>
+            <a:endParaRPr lang="en-US" sz="1400" dirty="0"/>
           </a:p>
         </p:txBody>
       </p:sp>
@@ -6961,7 +8164,7 @@
           <p:cNvPr id="2" name="Title 1">
             <a:extLst>
               <a:ext uri="{FF2B5EF4-FFF2-40B4-BE49-F238E27FC236}">
-                <a16:creationId xmlns:a16="http://schemas.microsoft.com/office/drawing/2014/main" id="{41DB42AF-D2CE-8C6D-D5EA-10594770E34A}"/>
+                <a16:creationId xmlns:a16="http://schemas.microsoft.com/office/drawing/2014/main" id="{5A14A4F9-121F-DC50-AB45-B19769E6C514}"/>
               </a:ext>
             </a:extLst>
           </p:cNvPr>
@@ -6978,19 +8181,1213 @@
           <a:lstStyle/>
           <a:p>
             <a:r>
-              <a:rPr lang="en-GB" dirty="0" err="1"/>
+              <a:rPr lang="en-US"/>
+              <a:t>NOSQL - Redis</a:t>
+            </a:r>
+          </a:p>
+        </p:txBody>
+      </p:sp>
+      <p:sp>
+        <p:nvSpPr>
+          <p:cNvPr id="3" name="Content Placeholder 2">
+            <a:extLst>
+              <a:ext uri="{FF2B5EF4-FFF2-40B4-BE49-F238E27FC236}">
+                <a16:creationId xmlns:a16="http://schemas.microsoft.com/office/drawing/2014/main" id="{8170D858-6851-EBE4-E050-BC262E5C6E04}"/>
+              </a:ext>
+            </a:extLst>
+          </p:cNvPr>
+          <p:cNvSpPr>
+            <a:spLocks noGrp="1"/>
+          </p:cNvSpPr>
+          <p:nvPr>
+            <p:ph idx="1"/>
+          </p:nvPr>
+        </p:nvSpPr>
+        <p:spPr>
+          <a:xfrm>
+            <a:off x="1115568" y="2478024"/>
+            <a:ext cx="10168128" cy="3919028"/>
+          </a:xfrm>
+        </p:spPr>
+        <p:txBody>
+          <a:bodyPr vert="horz" lIns="91440" tIns="45720" rIns="91440" bIns="45720" rtlCol="0" anchor="t">
+            <a:normAutofit fontScale="92500" lnSpcReduction="20000"/>
+          </a:bodyPr>
+          <a:lstStyle/>
+          <a:p>
+            <a:pPr>
+              <a:lnSpc>
+                <a:spcPct val="90000"/>
+              </a:lnSpc>
+            </a:pPr>
+            <a:r>
+              <a:rPr lang="en-US" dirty="0">
+                <a:ea typeface="+mn-lt"/>
+                <a:cs typeface="+mn-lt"/>
+              </a:rPr>
+              <a:t>In-memory (</a:t>
+            </a:r>
+            <a:r>
+              <a:rPr lang="en-US" dirty="0" err="1">
+                <a:ea typeface="+mn-lt"/>
+                <a:cs typeface="+mn-lt"/>
+              </a:rPr>
+              <a:t>memóriában</a:t>
+            </a:r>
+            <a:r>
+              <a:rPr lang="en-US" dirty="0">
+                <a:ea typeface="+mn-lt"/>
+                <a:cs typeface="+mn-lt"/>
+              </a:rPr>
+              <a:t> </a:t>
+            </a:r>
+            <a:r>
+              <a:rPr lang="en-US" dirty="0" err="1">
+                <a:ea typeface="+mn-lt"/>
+                <a:cs typeface="+mn-lt"/>
+              </a:rPr>
+              <a:t>tárol</a:t>
+            </a:r>
+            <a:r>
+              <a:rPr lang="en-US" dirty="0">
+                <a:ea typeface="+mn-lt"/>
+                <a:cs typeface="+mn-lt"/>
+              </a:rPr>
+              <a:t> </a:t>
+            </a:r>
+            <a:r>
+              <a:rPr lang="en-US" dirty="0" err="1">
+                <a:ea typeface="+mn-lt"/>
+                <a:cs typeface="+mn-lt"/>
+              </a:rPr>
+              <a:t>adatokat</a:t>
+            </a:r>
+            <a:r>
+              <a:rPr lang="en-US" dirty="0">
+                <a:ea typeface="+mn-lt"/>
+                <a:cs typeface="+mn-lt"/>
+              </a:rPr>
+              <a:t>) </a:t>
+            </a:r>
+            <a:endParaRPr lang="en-US" dirty="0"/>
+          </a:p>
+          <a:p>
+            <a:pPr>
+              <a:lnSpc>
+                <a:spcPct val="90000"/>
+              </a:lnSpc>
+            </a:pPr>
+            <a:r>
+              <a:rPr lang="en-US" dirty="0" err="1">
+                <a:ea typeface="+mn-lt"/>
+                <a:cs typeface="+mn-lt"/>
+              </a:rPr>
+              <a:t>Kulcs</a:t>
+            </a:r>
+            <a:r>
+              <a:rPr lang="en-US" dirty="0">
+                <a:ea typeface="+mn-lt"/>
+                <a:cs typeface="+mn-lt"/>
+              </a:rPr>
+              <a:t>–</a:t>
+            </a:r>
+            <a:r>
+              <a:rPr lang="en-US" dirty="0" err="1">
+                <a:ea typeface="+mn-lt"/>
+                <a:cs typeface="+mn-lt"/>
+              </a:rPr>
+              <a:t>érték</a:t>
+            </a:r>
+            <a:r>
+              <a:rPr lang="en-US" dirty="0">
+                <a:ea typeface="+mn-lt"/>
+                <a:cs typeface="+mn-lt"/>
+              </a:rPr>
+              <a:t> (key-value) </a:t>
+            </a:r>
+            <a:r>
+              <a:rPr lang="en-US" dirty="0" err="1">
+                <a:ea typeface="+mn-lt"/>
+                <a:cs typeface="+mn-lt"/>
+              </a:rPr>
+              <a:t>adatbázis</a:t>
+            </a:r>
+            <a:r>
+              <a:rPr lang="en-US" dirty="0">
+                <a:ea typeface="+mn-lt"/>
+                <a:cs typeface="+mn-lt"/>
+              </a:rPr>
+              <a:t> </a:t>
+            </a:r>
+            <a:endParaRPr lang="en-US" dirty="0"/>
+          </a:p>
+          <a:p>
+            <a:pPr>
+              <a:lnSpc>
+                <a:spcPct val="90000"/>
+              </a:lnSpc>
+            </a:pPr>
+            <a:r>
+              <a:rPr lang="en-US" dirty="0" err="1">
+                <a:ea typeface="+mn-lt"/>
+                <a:cs typeface="+mn-lt"/>
+              </a:rPr>
+              <a:t>Nagyon</a:t>
+            </a:r>
+            <a:r>
+              <a:rPr lang="en-US" dirty="0">
+                <a:ea typeface="+mn-lt"/>
+                <a:cs typeface="+mn-lt"/>
+              </a:rPr>
+              <a:t> </a:t>
+            </a:r>
+            <a:r>
+              <a:rPr lang="en-US" dirty="0" err="1">
+                <a:ea typeface="+mn-lt"/>
+                <a:cs typeface="+mn-lt"/>
+              </a:rPr>
+              <a:t>gyors</a:t>
+            </a:r>
+            <a:r>
+              <a:rPr lang="en-US" dirty="0">
+                <a:ea typeface="+mn-lt"/>
+                <a:cs typeface="+mn-lt"/>
+              </a:rPr>
+              <a:t> (cache-</a:t>
+            </a:r>
+            <a:r>
+              <a:rPr lang="en-US" dirty="0" err="1">
+                <a:ea typeface="+mn-lt"/>
+                <a:cs typeface="+mn-lt"/>
+              </a:rPr>
+              <a:t>elésre</a:t>
+            </a:r>
+            <a:r>
+              <a:rPr lang="en-US" dirty="0">
+                <a:ea typeface="+mn-lt"/>
+                <a:cs typeface="+mn-lt"/>
+              </a:rPr>
+              <a:t> </a:t>
+            </a:r>
+            <a:r>
+              <a:rPr lang="en-US" dirty="0" err="1">
+                <a:ea typeface="+mn-lt"/>
+                <a:cs typeface="+mn-lt"/>
+              </a:rPr>
+              <a:t>ideális</a:t>
+            </a:r>
+            <a:r>
+              <a:rPr lang="en-US" dirty="0">
+                <a:ea typeface="+mn-lt"/>
+                <a:cs typeface="+mn-lt"/>
+              </a:rPr>
+              <a:t>) </a:t>
+            </a:r>
+            <a:endParaRPr lang="en-US" dirty="0"/>
+          </a:p>
+          <a:p>
+            <a:pPr marL="0" indent="0">
+              <a:lnSpc>
+                <a:spcPct val="90000"/>
+              </a:lnSpc>
+              <a:buNone/>
+            </a:pPr>
+            <a:endParaRPr lang="en-US" dirty="0"/>
+          </a:p>
+          <a:p>
+            <a:pPr>
+              <a:lnSpc>
+                <a:spcPct val="90000"/>
+              </a:lnSpc>
+            </a:pPr>
+            <a:r>
+              <a:rPr lang="en-US" dirty="0">
+                <a:ea typeface="+mn-lt"/>
+                <a:cs typeface="+mn-lt"/>
+              </a:rPr>
+              <a:t>Session </a:t>
+            </a:r>
+            <a:r>
+              <a:rPr lang="en-US" dirty="0" err="1">
+                <a:ea typeface="+mn-lt"/>
+                <a:cs typeface="+mn-lt"/>
+              </a:rPr>
+              <a:t>kezelés</a:t>
+            </a:r>
+            <a:endParaRPr lang="en-US" dirty="0" err="1"/>
+          </a:p>
+          <a:p>
+            <a:pPr>
+              <a:lnSpc>
+                <a:spcPct val="90000"/>
+              </a:lnSpc>
+            </a:pPr>
+            <a:endParaRPr lang="en-US" dirty="0">
+              <a:ea typeface="+mn-lt"/>
+              <a:cs typeface="+mn-lt"/>
+            </a:endParaRPr>
+          </a:p>
+          <a:p>
+            <a:pPr>
+              <a:lnSpc>
+                <a:spcPct val="90000"/>
+              </a:lnSpc>
+            </a:pPr>
+            <a:r>
+              <a:rPr lang="en-US" dirty="0" err="1">
+                <a:ea typeface="+mn-lt"/>
+                <a:cs typeface="+mn-lt"/>
+              </a:rPr>
+              <a:t>Valós</a:t>
+            </a:r>
+            <a:r>
+              <a:rPr lang="en-US" dirty="0">
+                <a:ea typeface="+mn-lt"/>
+                <a:cs typeface="+mn-lt"/>
+              </a:rPr>
+              <a:t> </a:t>
+            </a:r>
+            <a:r>
+              <a:rPr lang="en-US" dirty="0" err="1">
+                <a:ea typeface="+mn-lt"/>
+                <a:cs typeface="+mn-lt"/>
+              </a:rPr>
+              <a:t>idejű</a:t>
+            </a:r>
+            <a:r>
+              <a:rPr lang="en-US" dirty="0">
+                <a:ea typeface="+mn-lt"/>
+                <a:cs typeface="+mn-lt"/>
+              </a:rPr>
+              <a:t> </a:t>
+            </a:r>
+            <a:r>
+              <a:rPr lang="en-US" dirty="0" err="1">
+                <a:ea typeface="+mn-lt"/>
+                <a:cs typeface="+mn-lt"/>
+              </a:rPr>
+              <a:t>alkalmazások</a:t>
+            </a:r>
+            <a:r>
+              <a:rPr lang="en-US" dirty="0">
+                <a:ea typeface="+mn-lt"/>
+                <a:cs typeface="+mn-lt"/>
+              </a:rPr>
+              <a:t> </a:t>
+            </a:r>
+            <a:endParaRPr lang="en-US" dirty="0"/>
+          </a:p>
+          <a:p>
+            <a:pPr>
+              <a:lnSpc>
+                <a:spcPct val="90000"/>
+              </a:lnSpc>
+            </a:pPr>
+            <a:r>
+              <a:rPr lang="en-US" dirty="0">
+                <a:ea typeface="+mn-lt"/>
+                <a:cs typeface="+mn-lt"/>
+              </a:rPr>
+              <a:t>Előny: </a:t>
+            </a:r>
+            <a:r>
+              <a:rPr lang="en-US" dirty="0" err="1">
+                <a:ea typeface="+mn-lt"/>
+                <a:cs typeface="+mn-lt"/>
+              </a:rPr>
+              <a:t>Extrém</a:t>
+            </a:r>
+            <a:r>
+              <a:rPr lang="en-US" dirty="0">
+                <a:ea typeface="+mn-lt"/>
+                <a:cs typeface="+mn-lt"/>
+              </a:rPr>
+              <a:t> </a:t>
+            </a:r>
+            <a:r>
+              <a:rPr lang="en-US" dirty="0" err="1">
+                <a:ea typeface="+mn-lt"/>
+                <a:cs typeface="+mn-lt"/>
+              </a:rPr>
+              <a:t>gyors</a:t>
+            </a:r>
+            <a:endParaRPr lang="en-US" dirty="0" err="1"/>
+          </a:p>
+          <a:p>
+            <a:pPr>
+              <a:lnSpc>
+                <a:spcPct val="90000"/>
+              </a:lnSpc>
+            </a:pPr>
+            <a:r>
+              <a:rPr lang="en-US" dirty="0" err="1">
+                <a:ea typeface="+mn-lt"/>
+                <a:cs typeface="+mn-lt"/>
+              </a:rPr>
+              <a:t>Hátrány</a:t>
+            </a:r>
+            <a:r>
+              <a:rPr lang="en-US" dirty="0">
+                <a:ea typeface="+mn-lt"/>
+                <a:cs typeface="+mn-lt"/>
+              </a:rPr>
+              <a:t>: </a:t>
+            </a:r>
+            <a:r>
+              <a:rPr lang="en-US" dirty="0" err="1">
+                <a:ea typeface="+mn-lt"/>
+                <a:cs typeface="+mn-lt"/>
+              </a:rPr>
+              <a:t>Memóriafüggő</a:t>
+            </a:r>
+            <a:r>
+              <a:rPr lang="en-US" dirty="0">
+                <a:ea typeface="+mn-lt"/>
+                <a:cs typeface="+mn-lt"/>
+              </a:rPr>
+              <a:t> (</a:t>
+            </a:r>
+            <a:r>
+              <a:rPr lang="en-US" dirty="0" err="1">
+                <a:ea typeface="+mn-lt"/>
+                <a:cs typeface="+mn-lt"/>
+              </a:rPr>
+              <a:t>adatvesztés</a:t>
+            </a:r>
+            <a:r>
+              <a:rPr lang="en-US" dirty="0">
+                <a:ea typeface="+mn-lt"/>
+                <a:cs typeface="+mn-lt"/>
+              </a:rPr>
+              <a:t> </a:t>
+            </a:r>
+            <a:r>
+              <a:rPr lang="en-US" dirty="0" err="1">
+                <a:ea typeface="+mn-lt"/>
+                <a:cs typeface="+mn-lt"/>
+              </a:rPr>
+              <a:t>lehet</a:t>
+            </a:r>
+            <a:r>
+              <a:rPr lang="en-US" dirty="0">
+                <a:ea typeface="+mn-lt"/>
+                <a:cs typeface="+mn-lt"/>
+              </a:rPr>
+              <a:t>, ha </a:t>
+            </a:r>
+            <a:r>
+              <a:rPr lang="en-US" dirty="0" err="1">
+                <a:ea typeface="+mn-lt"/>
+                <a:cs typeface="+mn-lt"/>
+              </a:rPr>
+              <a:t>nincs</a:t>
+            </a:r>
+            <a:r>
+              <a:rPr lang="en-US" dirty="0">
+                <a:ea typeface="+mn-lt"/>
+                <a:cs typeface="+mn-lt"/>
+              </a:rPr>
+              <a:t> </a:t>
+            </a:r>
+            <a:r>
+              <a:rPr lang="en-US" dirty="0" err="1">
+                <a:ea typeface="+mn-lt"/>
+                <a:cs typeface="+mn-lt"/>
+              </a:rPr>
+              <a:t>mentés</a:t>
+            </a:r>
+            <a:r>
+              <a:rPr lang="en-US" dirty="0">
+                <a:ea typeface="+mn-lt"/>
+                <a:cs typeface="+mn-lt"/>
+              </a:rPr>
+              <a:t>)</a:t>
+            </a:r>
+            <a:endParaRPr lang="en-US"/>
+          </a:p>
+        </p:txBody>
+      </p:sp>
+      <p:pic>
+        <p:nvPicPr>
+          <p:cNvPr id="4" name="Picture 3" descr="A black background with white text&#10;&#10;AI-generated content may be incorrect.">
+            <a:extLst>
+              <a:ext uri="{FF2B5EF4-FFF2-40B4-BE49-F238E27FC236}">
+                <a16:creationId xmlns:a16="http://schemas.microsoft.com/office/drawing/2014/main" id="{2D117A64-25BB-3A4A-EC7F-61DA2443DBE8}"/>
+              </a:ext>
+            </a:extLst>
+          </p:cNvPr>
+          <p:cNvPicPr>
+            <a:picLocks noChangeAspect="1"/>
+          </p:cNvPicPr>
+          <p:nvPr/>
+        </p:nvPicPr>
+        <p:blipFill>
+          <a:blip r:embed="rId3"/>
+          <a:stretch>
+            <a:fillRect/>
+          </a:stretch>
+        </p:blipFill>
+        <p:spPr>
+          <a:xfrm>
+            <a:off x="6403065" y="3918368"/>
+            <a:ext cx="4582461" cy="832578"/>
+          </a:xfrm>
+          <a:prstGeom prst="rect">
+            <a:avLst/>
+          </a:prstGeom>
+        </p:spPr>
+      </p:pic>
+      <p:sp>
+        <p:nvSpPr>
+          <p:cNvPr id="5" name="Arrow: Right 4">
+            <a:extLst>
+              <a:ext uri="{FF2B5EF4-FFF2-40B4-BE49-F238E27FC236}">
+                <a16:creationId xmlns:a16="http://schemas.microsoft.com/office/drawing/2014/main" id="{1AF96909-4617-6D0F-7143-9FC480361F39}"/>
+              </a:ext>
+            </a:extLst>
+          </p:cNvPr>
+          <p:cNvSpPr/>
+          <p:nvPr/>
+        </p:nvSpPr>
+        <p:spPr>
+          <a:xfrm>
+            <a:off x="3866122" y="4125372"/>
+            <a:ext cx="2330716" cy="303966"/>
+          </a:xfrm>
+          <a:prstGeom prst="rightArrow">
+            <a:avLst/>
+          </a:prstGeom>
+          <a:solidFill>
+            <a:schemeClr val="tx1"/>
+          </a:solidFill>
+          <a:ln>
+            <a:solidFill>
+              <a:schemeClr val="tx1"/>
+            </a:solidFill>
+          </a:ln>
+        </p:spPr>
+        <p:style>
+          <a:lnRef idx="2">
+            <a:schemeClr val="accent1">
+              <a:shade val="15000"/>
+            </a:schemeClr>
+          </a:lnRef>
+          <a:fillRef idx="1">
+            <a:schemeClr val="accent1"/>
+          </a:fillRef>
+          <a:effectRef idx="0">
+            <a:schemeClr val="accent1"/>
+          </a:effectRef>
+          <a:fontRef idx="minor">
+            <a:schemeClr val="lt1"/>
+          </a:fontRef>
+        </p:style>
+        <p:txBody>
+          <a:bodyPr rtlCol="0" anchor="ctr"/>
+          <a:lstStyle/>
+          <a:p>
+            <a:pPr algn="ctr"/>
+            <a:endParaRPr lang="en-US"/>
+          </a:p>
+        </p:txBody>
+      </p:sp>
+    </p:spTree>
+    <p:extLst>
+      <p:ext uri="{BB962C8B-B14F-4D97-AF65-F5344CB8AC3E}">
+        <p14:creationId xmlns:p14="http://schemas.microsoft.com/office/powerpoint/2010/main" val="3553344801"/>
+      </p:ext>
+    </p:extLst>
+  </p:cSld>
+  <p:clrMapOvr>
+    <a:masterClrMapping/>
+  </p:clrMapOvr>
+</p:sld>
+</file>
+
+<file path=ppt/slides/slide7.xml><?xml version="1.0" encoding="utf-8"?>
+<p:sld xmlns:a="http://schemas.openxmlformats.org/drawingml/2006/main" xmlns:r="http://schemas.openxmlformats.org/officeDocument/2006/relationships" xmlns:p="http://schemas.openxmlformats.org/presentationml/2006/main">
+  <p:cSld>
+    <p:spTree>
+      <p:nvGrpSpPr>
+        <p:cNvPr id="1" name=""/>
+        <p:cNvGrpSpPr/>
+        <p:nvPr/>
+      </p:nvGrpSpPr>
+      <p:grpSpPr>
+        <a:xfrm>
+          <a:off x="0" y="0"/>
+          <a:ext cx="0" cy="0"/>
+          <a:chOff x="0" y="0"/>
+          <a:chExt cx="0" cy="0"/>
+        </a:xfrm>
+      </p:grpSpPr>
+      <p:sp>
+        <p:nvSpPr>
+          <p:cNvPr id="2" name="Title 1">
+            <a:extLst>
+              <a:ext uri="{FF2B5EF4-FFF2-40B4-BE49-F238E27FC236}">
+                <a16:creationId xmlns:a16="http://schemas.microsoft.com/office/drawing/2014/main" id="{4BB6DE51-2FD8-E60C-B979-EF19298C34C0}"/>
+              </a:ext>
+            </a:extLst>
+          </p:cNvPr>
+          <p:cNvSpPr>
+            <a:spLocks noGrp="1"/>
+          </p:cNvSpPr>
+          <p:nvPr>
+            <p:ph type="title"/>
+          </p:nvPr>
+        </p:nvSpPr>
+        <p:spPr/>
+        <p:txBody>
+          <a:bodyPr/>
+          <a:lstStyle/>
+          <a:p>
+            <a:r>
+              <a:rPr lang="en-US"/>
+              <a:t>NOSQL - Elasticsearch</a:t>
+            </a:r>
+          </a:p>
+        </p:txBody>
+      </p:sp>
+      <p:sp>
+        <p:nvSpPr>
+          <p:cNvPr id="3" name="Content Placeholder 2">
+            <a:extLst>
+              <a:ext uri="{FF2B5EF4-FFF2-40B4-BE49-F238E27FC236}">
+                <a16:creationId xmlns:a16="http://schemas.microsoft.com/office/drawing/2014/main" id="{49B59618-FE93-D299-585C-B961FE49460A}"/>
+              </a:ext>
+            </a:extLst>
+          </p:cNvPr>
+          <p:cNvSpPr>
+            <a:spLocks noGrp="1"/>
+          </p:cNvSpPr>
+          <p:nvPr>
+            <p:ph idx="1"/>
+          </p:nvPr>
+        </p:nvSpPr>
+        <p:spPr>
+          <a:xfrm>
+            <a:off x="1115568" y="1848150"/>
+            <a:ext cx="10851974" cy="4324050"/>
+          </a:xfrm>
+        </p:spPr>
+        <p:txBody>
+          <a:bodyPr vert="horz" lIns="91440" tIns="45720" rIns="91440" bIns="45720" rtlCol="0" anchor="t">
+            <a:normAutofit lnSpcReduction="10000"/>
+          </a:bodyPr>
+          <a:lstStyle/>
+          <a:p>
+            <a:pPr>
+              <a:lnSpc>
+                <a:spcPct val="90000"/>
+              </a:lnSpc>
+            </a:pPr>
+            <a:r>
+              <a:rPr lang="en-US" dirty="0" err="1">
+                <a:ea typeface="+mn-lt"/>
+                <a:cs typeface="+mn-lt"/>
+              </a:rPr>
+              <a:t>Elosztott</a:t>
+            </a:r>
+            <a:r>
+              <a:rPr lang="en-US" dirty="0">
+                <a:ea typeface="+mn-lt"/>
+                <a:cs typeface="+mn-lt"/>
+              </a:rPr>
+              <a:t> </a:t>
+            </a:r>
+            <a:r>
+              <a:rPr lang="en-US" dirty="0" err="1">
+                <a:ea typeface="+mn-lt"/>
+                <a:cs typeface="+mn-lt"/>
+              </a:rPr>
+              <a:t>kereső</a:t>
+            </a:r>
+            <a:r>
+              <a:rPr lang="en-US" dirty="0">
+                <a:ea typeface="+mn-lt"/>
+                <a:cs typeface="+mn-lt"/>
+              </a:rPr>
+              <a:t>- </a:t>
+            </a:r>
+            <a:r>
+              <a:rPr lang="en-US" dirty="0" err="1">
+                <a:ea typeface="+mn-lt"/>
+                <a:cs typeface="+mn-lt"/>
+              </a:rPr>
+              <a:t>és</a:t>
+            </a:r>
+            <a:r>
+              <a:rPr lang="en-US" dirty="0">
+                <a:ea typeface="+mn-lt"/>
+                <a:cs typeface="+mn-lt"/>
+              </a:rPr>
+              <a:t> </a:t>
+            </a:r>
+            <a:r>
+              <a:rPr lang="en-US" dirty="0" err="1">
+                <a:ea typeface="+mn-lt"/>
+                <a:cs typeface="+mn-lt"/>
+              </a:rPr>
+              <a:t>analitikai</a:t>
+            </a:r>
+            <a:r>
+              <a:rPr lang="en-US" dirty="0">
+                <a:ea typeface="+mn-lt"/>
+                <a:cs typeface="+mn-lt"/>
+              </a:rPr>
+              <a:t> motor </a:t>
+            </a:r>
+            <a:endParaRPr lang="en-US" dirty="0"/>
+          </a:p>
+          <a:p>
+            <a:pPr>
+              <a:lnSpc>
+                <a:spcPct val="90000"/>
+              </a:lnSpc>
+            </a:pPr>
+            <a:r>
+              <a:rPr lang="en-US" dirty="0">
+                <a:ea typeface="+mn-lt"/>
+                <a:cs typeface="+mn-lt"/>
+              </a:rPr>
+              <a:t>JSON </a:t>
+            </a:r>
+            <a:r>
+              <a:rPr lang="en-US" dirty="0" err="1">
+                <a:ea typeface="+mn-lt"/>
+                <a:cs typeface="+mn-lt"/>
+              </a:rPr>
+              <a:t>dokumentumokat</a:t>
+            </a:r>
+            <a:r>
+              <a:rPr lang="en-US" dirty="0">
+                <a:ea typeface="+mn-lt"/>
+                <a:cs typeface="+mn-lt"/>
+              </a:rPr>
+              <a:t> </a:t>
+            </a:r>
+            <a:r>
+              <a:rPr lang="en-US" dirty="0" err="1">
+                <a:ea typeface="+mn-lt"/>
+                <a:cs typeface="+mn-lt"/>
+              </a:rPr>
+              <a:t>kezel</a:t>
+            </a:r>
+            <a:r>
+              <a:rPr lang="en-US" dirty="0">
+                <a:ea typeface="+mn-lt"/>
+                <a:cs typeface="+mn-lt"/>
+              </a:rPr>
+              <a:t> </a:t>
+            </a:r>
+            <a:endParaRPr lang="en-US" dirty="0"/>
+          </a:p>
+          <a:p>
+            <a:pPr>
+              <a:lnSpc>
+                <a:spcPct val="90000"/>
+              </a:lnSpc>
+            </a:pPr>
+            <a:r>
+              <a:rPr lang="en-US" dirty="0" err="1">
+                <a:ea typeface="+mn-lt"/>
+                <a:cs typeface="+mn-lt"/>
+              </a:rPr>
+              <a:t>Alapja</a:t>
+            </a:r>
+            <a:r>
+              <a:rPr lang="en-US" dirty="0">
+                <a:ea typeface="+mn-lt"/>
+                <a:cs typeface="+mn-lt"/>
+              </a:rPr>
+              <a:t> </a:t>
+            </a:r>
+            <a:r>
+              <a:rPr lang="en-US" dirty="0" err="1">
+                <a:ea typeface="+mn-lt"/>
+                <a:cs typeface="+mn-lt"/>
+              </a:rPr>
+              <a:t>az</a:t>
+            </a:r>
+            <a:r>
+              <a:rPr lang="en-US" dirty="0">
+                <a:ea typeface="+mn-lt"/>
+                <a:cs typeface="+mn-lt"/>
+              </a:rPr>
+              <a:t> Apache Lucene</a:t>
+            </a:r>
+            <a:endParaRPr lang="en-US" dirty="0"/>
+          </a:p>
+          <a:p>
+            <a:pPr>
+              <a:lnSpc>
+                <a:spcPct val="90000"/>
+              </a:lnSpc>
+            </a:pPr>
+            <a:r>
+              <a:rPr lang="en-US" b="1" dirty="0" err="1">
+                <a:ea typeface="+mn-lt"/>
+                <a:cs typeface="+mn-lt"/>
+              </a:rPr>
+              <a:t>Gyors</a:t>
+            </a:r>
+            <a:r>
+              <a:rPr lang="en-US" b="1" dirty="0">
+                <a:ea typeface="+mn-lt"/>
+                <a:cs typeface="+mn-lt"/>
+              </a:rPr>
+              <a:t> </a:t>
+            </a:r>
+            <a:r>
+              <a:rPr lang="en-US" b="1" dirty="0" err="1">
+                <a:ea typeface="+mn-lt"/>
+                <a:cs typeface="+mn-lt"/>
+              </a:rPr>
+              <a:t>keresés</a:t>
+            </a:r>
+            <a:r>
+              <a:rPr lang="en-US" b="1" dirty="0">
+                <a:ea typeface="+mn-lt"/>
+                <a:cs typeface="+mn-lt"/>
+              </a:rPr>
+              <a:t> </a:t>
+            </a:r>
+            <a:r>
+              <a:rPr lang="en-US" b="1" dirty="0" err="1">
+                <a:ea typeface="+mn-lt"/>
+                <a:cs typeface="+mn-lt"/>
+              </a:rPr>
+              <a:t>nagy</a:t>
+            </a:r>
+            <a:r>
+              <a:rPr lang="en-US" b="1" dirty="0">
+                <a:ea typeface="+mn-lt"/>
+                <a:cs typeface="+mn-lt"/>
+              </a:rPr>
+              <a:t> </a:t>
+            </a:r>
+            <a:r>
+              <a:rPr lang="en-US" b="1" dirty="0" err="1">
+                <a:ea typeface="+mn-lt"/>
+                <a:cs typeface="+mn-lt"/>
+              </a:rPr>
+              <a:t>adathalmazban</a:t>
+            </a:r>
+            <a:r>
+              <a:rPr lang="en-US" b="1" dirty="0">
+                <a:ea typeface="+mn-lt"/>
+                <a:cs typeface="+mn-lt"/>
+              </a:rPr>
+              <a:t> </a:t>
+            </a:r>
+            <a:endParaRPr lang="en-US" b="1" dirty="0"/>
+          </a:p>
+          <a:p>
+            <a:pPr>
+              <a:lnSpc>
+                <a:spcPct val="90000"/>
+              </a:lnSpc>
+            </a:pPr>
+            <a:r>
+              <a:rPr lang="en-US" dirty="0">
+                <a:ea typeface="+mn-lt"/>
+                <a:cs typeface="+mn-lt"/>
+              </a:rPr>
+              <a:t>Log </a:t>
+            </a:r>
+            <a:r>
+              <a:rPr lang="en-US" dirty="0" err="1">
+                <a:ea typeface="+mn-lt"/>
+                <a:cs typeface="+mn-lt"/>
+              </a:rPr>
+              <a:t>elemzés</a:t>
+            </a:r>
+            <a:r>
+              <a:rPr lang="en-US" dirty="0">
+                <a:ea typeface="+mn-lt"/>
+                <a:cs typeface="+mn-lt"/>
+              </a:rPr>
+              <a:t> </a:t>
+            </a:r>
+            <a:endParaRPr lang="en-US" dirty="0"/>
+          </a:p>
+          <a:p>
+            <a:pPr>
+              <a:lnSpc>
+                <a:spcPct val="90000"/>
+              </a:lnSpc>
+            </a:pPr>
+            <a:r>
+              <a:rPr lang="en-US" dirty="0">
+                <a:ea typeface="+mn-lt"/>
+                <a:cs typeface="+mn-lt"/>
+              </a:rPr>
+              <a:t>Webes </a:t>
+            </a:r>
+            <a:r>
+              <a:rPr lang="en-US" dirty="0" err="1">
+                <a:ea typeface="+mn-lt"/>
+                <a:cs typeface="+mn-lt"/>
+              </a:rPr>
+              <a:t>keresők</a:t>
+            </a:r>
+            <a:r>
+              <a:rPr lang="en-US" dirty="0">
+                <a:ea typeface="+mn-lt"/>
+                <a:cs typeface="+mn-lt"/>
+              </a:rPr>
+              <a:t> (pl. </a:t>
+            </a:r>
+            <a:r>
+              <a:rPr lang="en-US" dirty="0" err="1">
+                <a:ea typeface="+mn-lt"/>
+                <a:cs typeface="+mn-lt"/>
+              </a:rPr>
+              <a:t>webshop</a:t>
+            </a:r>
+            <a:r>
+              <a:rPr lang="en-US" dirty="0">
+                <a:ea typeface="+mn-lt"/>
+                <a:cs typeface="+mn-lt"/>
+              </a:rPr>
+              <a:t>) </a:t>
+            </a:r>
+            <a:endParaRPr lang="en-US" dirty="0"/>
+          </a:p>
+          <a:p>
+            <a:pPr>
+              <a:lnSpc>
+                <a:spcPct val="90000"/>
+              </a:lnSpc>
+            </a:pPr>
+            <a:r>
+              <a:rPr lang="en-US" dirty="0" err="1">
+                <a:ea typeface="+mn-lt"/>
+                <a:cs typeface="+mn-lt"/>
+              </a:rPr>
+              <a:t>Előnyök</a:t>
+            </a:r>
+            <a:r>
+              <a:rPr lang="en-US" dirty="0">
+                <a:ea typeface="+mn-lt"/>
+                <a:cs typeface="+mn-lt"/>
+              </a:rPr>
+              <a:t>: </a:t>
+            </a:r>
+            <a:r>
+              <a:rPr lang="en-US" dirty="0" err="1">
+                <a:ea typeface="+mn-lt"/>
+                <a:cs typeface="+mn-lt"/>
+              </a:rPr>
+              <a:t>Nagyon</a:t>
+            </a:r>
+            <a:r>
+              <a:rPr lang="en-US" dirty="0">
+                <a:ea typeface="+mn-lt"/>
+                <a:cs typeface="+mn-lt"/>
+              </a:rPr>
+              <a:t> </a:t>
+            </a:r>
+            <a:r>
+              <a:rPr lang="en-US" dirty="0" err="1">
+                <a:ea typeface="+mn-lt"/>
+                <a:cs typeface="+mn-lt"/>
+              </a:rPr>
+              <a:t>gyors</a:t>
+            </a:r>
+            <a:r>
+              <a:rPr lang="en-US" dirty="0">
+                <a:ea typeface="+mn-lt"/>
+                <a:cs typeface="+mn-lt"/>
+              </a:rPr>
+              <a:t> </a:t>
+            </a:r>
+            <a:r>
+              <a:rPr lang="en-US" dirty="0" err="1">
+                <a:ea typeface="+mn-lt"/>
+                <a:cs typeface="+mn-lt"/>
+              </a:rPr>
+              <a:t>keresés</a:t>
+            </a:r>
+            <a:r>
+              <a:rPr lang="en-US" dirty="0">
+                <a:ea typeface="+mn-lt"/>
+                <a:cs typeface="+mn-lt"/>
+              </a:rPr>
+              <a:t>, </a:t>
+            </a:r>
+            <a:r>
+              <a:rPr lang="en-US" dirty="0" err="1">
+                <a:ea typeface="+mn-lt"/>
+                <a:cs typeface="+mn-lt"/>
+              </a:rPr>
+              <a:t>közel</a:t>
+            </a:r>
+            <a:r>
+              <a:rPr lang="en-US" dirty="0">
+                <a:ea typeface="+mn-lt"/>
+                <a:cs typeface="+mn-lt"/>
+              </a:rPr>
+              <a:t> </a:t>
+            </a:r>
+            <a:r>
+              <a:rPr lang="en-US" dirty="0" err="1">
+                <a:ea typeface="+mn-lt"/>
+                <a:cs typeface="+mn-lt"/>
+              </a:rPr>
+              <a:t>valós</a:t>
+            </a:r>
+            <a:r>
+              <a:rPr lang="en-US" dirty="0">
+                <a:ea typeface="+mn-lt"/>
+                <a:cs typeface="+mn-lt"/>
+              </a:rPr>
+              <a:t> </a:t>
+            </a:r>
+            <a:r>
+              <a:rPr lang="en-US" dirty="0" err="1">
+                <a:ea typeface="+mn-lt"/>
+                <a:cs typeface="+mn-lt"/>
+              </a:rPr>
+              <a:t>idejű</a:t>
+            </a:r>
+            <a:r>
+              <a:rPr lang="en-US" dirty="0">
+                <a:ea typeface="+mn-lt"/>
+                <a:cs typeface="+mn-lt"/>
+              </a:rPr>
+              <a:t> </a:t>
+            </a:r>
+            <a:r>
+              <a:rPr lang="en-US" dirty="0" err="1">
+                <a:ea typeface="+mn-lt"/>
+                <a:cs typeface="+mn-lt"/>
+              </a:rPr>
+              <a:t>működés</a:t>
+            </a:r>
+            <a:r>
+              <a:rPr lang="en-US" dirty="0">
+                <a:ea typeface="+mn-lt"/>
+                <a:cs typeface="+mn-lt"/>
+              </a:rPr>
+              <a:t> </a:t>
+            </a:r>
+            <a:endParaRPr lang="en-US" dirty="0"/>
+          </a:p>
+          <a:p>
+            <a:pPr>
+              <a:lnSpc>
+                <a:spcPct val="90000"/>
+              </a:lnSpc>
+            </a:pPr>
+            <a:r>
+              <a:rPr lang="en-US" dirty="0" err="1">
+                <a:ea typeface="+mn-lt"/>
+                <a:cs typeface="+mn-lt"/>
+              </a:rPr>
+              <a:t>Hátrányok</a:t>
+            </a:r>
+            <a:r>
+              <a:rPr lang="en-US" dirty="0">
+                <a:ea typeface="+mn-lt"/>
+                <a:cs typeface="+mn-lt"/>
+              </a:rPr>
+              <a:t>: Nagy </a:t>
+            </a:r>
+            <a:r>
+              <a:rPr lang="en-US" dirty="0" err="1">
+                <a:ea typeface="+mn-lt"/>
+                <a:cs typeface="+mn-lt"/>
+              </a:rPr>
+              <a:t>erőforrás</a:t>
+            </a:r>
+            <a:r>
+              <a:rPr lang="en-US" dirty="0">
+                <a:ea typeface="+mn-lt"/>
+                <a:cs typeface="+mn-lt"/>
+              </a:rPr>
+              <a:t> </a:t>
+            </a:r>
+            <a:r>
+              <a:rPr lang="en-US" dirty="0" err="1">
+                <a:ea typeface="+mn-lt"/>
+                <a:cs typeface="+mn-lt"/>
+              </a:rPr>
+              <a:t>igény</a:t>
+            </a:r>
+            <a:r>
+              <a:rPr lang="en-US" dirty="0">
+                <a:ea typeface="+mn-lt"/>
+                <a:cs typeface="+mn-lt"/>
+              </a:rPr>
+              <a:t>, </a:t>
+            </a:r>
+            <a:r>
+              <a:rPr lang="en-US" dirty="0" err="1">
+                <a:ea typeface="+mn-lt"/>
+                <a:cs typeface="+mn-lt"/>
+              </a:rPr>
+              <a:t>nem</a:t>
+            </a:r>
+            <a:r>
+              <a:rPr lang="en-US" dirty="0">
+                <a:ea typeface="+mn-lt"/>
+                <a:cs typeface="+mn-lt"/>
+              </a:rPr>
+              <a:t> </a:t>
+            </a:r>
+            <a:r>
+              <a:rPr lang="en-US" dirty="0" err="1">
+                <a:ea typeface="+mn-lt"/>
+                <a:cs typeface="+mn-lt"/>
+              </a:rPr>
+              <a:t>klasszikus</a:t>
+            </a:r>
+            <a:r>
+              <a:rPr lang="en-US" dirty="0">
+                <a:ea typeface="+mn-lt"/>
+                <a:cs typeface="+mn-lt"/>
+              </a:rPr>
+              <a:t> </a:t>
+            </a:r>
+            <a:r>
+              <a:rPr lang="en-US" dirty="0" err="1">
+                <a:ea typeface="+mn-lt"/>
+                <a:cs typeface="+mn-lt"/>
+              </a:rPr>
+              <a:t>adatbázis</a:t>
+            </a:r>
+            <a:r>
+              <a:rPr lang="en-US" dirty="0">
+                <a:ea typeface="+mn-lt"/>
+                <a:cs typeface="+mn-lt"/>
+              </a:rPr>
+              <a:t> </a:t>
+            </a:r>
+            <a:r>
+              <a:rPr lang="en-US" dirty="0" err="1">
+                <a:ea typeface="+mn-lt"/>
+                <a:cs typeface="+mn-lt"/>
+              </a:rPr>
+              <a:t>pl:acid</a:t>
+            </a:r>
+            <a:r>
+              <a:rPr lang="en-US" dirty="0">
+                <a:ea typeface="+mn-lt"/>
+                <a:cs typeface="+mn-lt"/>
+              </a:rPr>
+              <a:t>, </a:t>
+            </a:r>
+            <a:r>
+              <a:rPr lang="en-US" dirty="0" err="1">
+                <a:ea typeface="+mn-lt"/>
+                <a:cs typeface="+mn-lt"/>
+              </a:rPr>
+              <a:t>bonyolultabb</a:t>
+            </a:r>
+            <a:r>
+              <a:rPr lang="en-US" dirty="0">
+                <a:ea typeface="+mn-lt"/>
+                <a:cs typeface="+mn-lt"/>
+              </a:rPr>
+              <a:t> </a:t>
+            </a:r>
+            <a:r>
+              <a:rPr lang="en-US" dirty="0" err="1">
+                <a:ea typeface="+mn-lt"/>
+                <a:cs typeface="+mn-lt"/>
+              </a:rPr>
+              <a:t>konfiguráció</a:t>
+            </a:r>
+            <a:endParaRPr lang="en-US" dirty="0"/>
+          </a:p>
+          <a:p>
+            <a:endParaRPr lang="en-US" dirty="0"/>
+          </a:p>
+        </p:txBody>
+      </p:sp>
+    </p:spTree>
+    <p:extLst>
+      <p:ext uri="{BB962C8B-B14F-4D97-AF65-F5344CB8AC3E}">
+        <p14:creationId xmlns:p14="http://schemas.microsoft.com/office/powerpoint/2010/main" val="1306639778"/>
+      </p:ext>
+    </p:extLst>
+  </p:cSld>
+  <p:clrMapOvr>
+    <a:masterClrMapping/>
+  </p:clrMapOvr>
+</p:sld>
+</file>
+
+<file path=ppt/slides/slide8.xml><?xml version="1.0" encoding="utf-8"?>
+<p:sld xmlns:a="http://schemas.openxmlformats.org/drawingml/2006/main" xmlns:r="http://schemas.openxmlformats.org/officeDocument/2006/relationships" xmlns:p="http://schemas.openxmlformats.org/presentationml/2006/main">
+  <p:cSld>
+    <p:spTree>
+      <p:nvGrpSpPr>
+        <p:cNvPr id="1" name=""/>
+        <p:cNvGrpSpPr/>
+        <p:nvPr/>
+      </p:nvGrpSpPr>
+      <p:grpSpPr>
+        <a:xfrm>
+          <a:off x="0" y="0"/>
+          <a:ext cx="0" cy="0"/>
+          <a:chOff x="0" y="0"/>
+          <a:chExt cx="0" cy="0"/>
+        </a:xfrm>
+      </p:grpSpPr>
+      <p:sp>
+        <p:nvSpPr>
+          <p:cNvPr id="2" name="Title 1">
+            <a:extLst>
+              <a:ext uri="{FF2B5EF4-FFF2-40B4-BE49-F238E27FC236}">
+                <a16:creationId xmlns:a16="http://schemas.microsoft.com/office/drawing/2014/main" id="{41DB42AF-D2CE-8C6D-D5EA-10594770E34A}"/>
+              </a:ext>
+            </a:extLst>
+          </p:cNvPr>
+          <p:cNvSpPr>
+            <a:spLocks noGrp="1"/>
+          </p:cNvSpPr>
+          <p:nvPr>
+            <p:ph type="title"/>
+          </p:nvPr>
+        </p:nvSpPr>
+        <p:spPr/>
+        <p:txBody>
+          <a:bodyPr/>
+          <a:lstStyle/>
+          <a:p>
+            <a:r>
+              <a:rPr lang="en-GB" sz="4400" dirty="0" err="1"/>
               <a:t>Mikor</a:t>
             </a:r>
             <a:r>
-              <a:rPr lang="en-GB" dirty="0"/>
+              <a:rPr lang="en-GB" sz="4400" dirty="0"/>
               <a:t> </a:t>
             </a:r>
             <a:r>
-              <a:rPr lang="en-GB" dirty="0" err="1"/>
+              <a:rPr lang="en-GB" sz="4400" dirty="0" err="1"/>
               <a:t>melyiket</a:t>
             </a:r>
             <a:r>
-              <a:rPr lang="en-GB" dirty="0"/>
+              <a:rPr lang="en-GB" sz="4400" dirty="0"/>
+              <a:t> </a:t>
+            </a:r>
+            <a:r>
+              <a:rPr lang="en-GB" sz="4400" dirty="0" err="1"/>
+              <a:t>érdemes</a:t>
+            </a:r>
+            <a:r>
+              <a:rPr lang="en-GB" sz="4400" dirty="0"/>
+              <a:t> </a:t>
+            </a:r>
+            <a:r>
+              <a:rPr lang="en-GB" sz="4400" dirty="0" err="1"/>
+              <a:t>használni</a:t>
+            </a:r>
+            <a:r>
+              <a:rPr lang="en-GB" sz="4400" dirty="0"/>
               <a:t>? </a:t>
             </a:r>
           </a:p>
@@ -7020,9 +9417,22 @@
           <a:lstStyle/>
           <a:p>
             <a:r>
-              <a:rPr lang="en-GB"/>
-              <a:t>SQL:</a:t>
-            </a:r>
+              <a:rPr lang="en-GB" sz="3200" dirty="0"/>
+              <a:t>SQL: </a:t>
+            </a:r>
+            <a:r>
+              <a:rPr lang="en-GB" sz="3200" dirty="0" err="1"/>
+              <a:t>Maximális</a:t>
+            </a:r>
+            <a:r>
+              <a:rPr lang="en-GB" sz="3200" dirty="0"/>
+              <a:t> </a:t>
+            </a:r>
+            <a:r>
+              <a:rPr lang="en-GB" sz="3200" dirty="0" err="1"/>
+              <a:t>megbízhatóság</a:t>
+            </a:r>
+            <a:endParaRPr lang="en-GB" sz="3200"/>
           </a:p>
           <a:p>
             <a:pPr lvl="1">
@@ -7030,14 +9440,25 @@
               <a:buChar char="o"/>
             </a:pPr>
             <a:r>
-              <a:rPr lang="en-GB" dirty="0"/>
+              <a:rPr lang="en-GB" sz="2800" dirty="0"/>
               <a:t>Banki </a:t>
             </a:r>
             <a:r>
-              <a:rPr lang="en-GB" dirty="0" err="1"/>
+              <a:rPr lang="en-GB" sz="2800" dirty="0" err="1"/>
               <a:t>rendszerek</a:t>
             </a:r>
-            <a:endParaRPr lang="en-GB"/>
+            <a:endParaRPr lang="en-GB" sz="2800"/>
+          </a:p>
+          <a:p>
+            <a:r>
+              <a:rPr lang="en-GB" sz="3200" dirty="0"/>
+              <a:t>NOSQL: Nagy </a:t>
+            </a:r>
+            <a:r>
+              <a:rPr lang="en-GB" sz="3200" dirty="0" err="1"/>
+              <a:t>adatmennyiség</a:t>
+            </a:r>
+            <a:endParaRPr lang="en-GB" sz="3200"/>
           </a:p>
           <a:p>
             <a:pPr lvl="1">
@@ -7045,89 +9466,10 @@
               <a:buChar char="o"/>
             </a:pPr>
             <a:r>
-              <a:rPr lang="en-GB" dirty="0"/>
-              <a:t>Pontos </a:t>
-            </a:r>
-            <a:r>
-              <a:rPr lang="en-GB" dirty="0" err="1"/>
-              <a:t>adatok</a:t>
-            </a:r>
-            <a:endParaRPr lang="en-GB" dirty="0"/>
-          </a:p>
-          <a:p>
-            <a:r>
-              <a:rPr lang="en-GB"/>
-              <a:t>NOSQL:</a:t>
-            </a:r>
-            <a:endParaRPr lang="en-GB" dirty="0"/>
-          </a:p>
-          <a:p>
-            <a:pPr lvl="1">
-              <a:buFont typeface="Courier New" panose="020B0604020202020204" pitchFamily="34" charset="0"/>
-              <a:buChar char="o"/>
-            </a:pPr>
-            <a:r>
-              <a:rPr lang="en-GB" dirty="0"/>
-              <a:t>Nagy </a:t>
-            </a:r>
-            <a:r>
-              <a:rPr lang="en-GB" dirty="0" err="1"/>
-              <a:t>adatmennyiség</a:t>
-            </a:r>
-            <a:endParaRPr lang="en-GB"/>
-          </a:p>
-          <a:p>
-            <a:pPr lvl="1">
-              <a:buFont typeface="Courier New" panose="020B0604020202020204" pitchFamily="34" charset="0"/>
-              <a:buChar char="o"/>
-            </a:pPr>
-            <a:r>
-              <a:rPr lang="en-GB" dirty="0"/>
-              <a:t>Webes </a:t>
-            </a:r>
-            <a:r>
-              <a:rPr lang="en-GB" dirty="0" err="1"/>
-              <a:t>alkalmazások</a:t>
-            </a:r>
-            <a:endParaRPr lang="en-GB"/>
-          </a:p>
-          <a:p>
-            <a:pPr marL="0" indent="0">
-              <a:buNone/>
-            </a:pPr>
-            <a:r>
-              <a:rPr lang="en-GB" dirty="0"/>
-              <a:t>Projekt </a:t>
-            </a:r>
-            <a:r>
-              <a:rPr lang="en-GB" dirty="0" err="1"/>
-              <a:t>igénye</a:t>
-            </a:r>
-            <a:r>
-              <a:rPr lang="en-GB" dirty="0"/>
-              <a:t> </a:t>
-            </a:r>
-            <a:r>
-              <a:rPr lang="en-GB" dirty="0" err="1"/>
-              <a:t>alapján</a:t>
-            </a:r>
-            <a:r>
-              <a:rPr lang="en-GB" dirty="0"/>
-              <a:t> </a:t>
-            </a:r>
-            <a:r>
-              <a:rPr lang="en-GB" dirty="0" err="1"/>
-              <a:t>kell</a:t>
-            </a:r>
-            <a:r>
-              <a:rPr lang="en-GB" dirty="0"/>
-              <a:t> </a:t>
-            </a:r>
-            <a:r>
-              <a:rPr lang="en-GB" dirty="0" err="1"/>
-              <a:t>dönteni</a:t>
-            </a:r>
-            <a:endParaRPr lang="en-GB"/>
+              <a:rPr lang="en-GB" sz="2800" dirty="0" err="1"/>
+              <a:t>Webshopok</a:t>
+            </a:r>
+            <a:endParaRPr lang="en-GB" sz="2800"/>
           </a:p>
         </p:txBody>
       </p:sp>
@@ -7144,7 +9486,7 @@
 </p:sld>
 </file>
 
-<file path=ppt/slides/slide7.xml><?xml version="1.0" encoding="utf-8"?>
+<file path=ppt/slides/slide9.xml><?xml version="1.0" encoding="utf-8"?>
 <p:sld xmlns:a="http://schemas.openxmlformats.org/drawingml/2006/main" xmlns:r="http://schemas.openxmlformats.org/officeDocument/2006/relationships" xmlns:p="http://schemas.openxmlformats.org/presentationml/2006/main">
   <p:cSld>
     <p:bg>
@@ -7446,8 +9788,20 @@
           <a:lstStyle/>
           <a:p>
             <a:r>
-              <a:rPr lang="en-US" sz="4800"/>
-              <a:t>Köszönöm a figyelmet!</a:t>
+              <a:rPr lang="en-US" sz="4800" dirty="0" err="1"/>
+              <a:t>Köszönjük</a:t>
+            </a:r>
+            <a:r>
+              <a:rPr lang="en-US" sz="4800" dirty="0"/>
+              <a:t> a </a:t>
+            </a:r>
+            <a:r>
+              <a:rPr lang="en-US" sz="4800" dirty="0" err="1"/>
+              <a:t>figyelmet</a:t>
+            </a:r>
+            <a:r>
+              <a:rPr lang="en-US" sz="4800" dirty="0"/>
+              <a:t>!</a:t>
             </a:r>
           </a:p>
         </p:txBody>
@@ -7655,13 +10009,13 @@
           <p:nvPr/>
         </p:nvPicPr>
         <p:blipFill>
-          <a:blip>
+          <a:blip r:embed="rId2">
             <a:extLst>
               <a:ext uri="{28A0092B-C50C-407E-A947-70E740481C1C}">
                 <a14:useLocalDpi xmlns:a14="http://schemas.microsoft.com/office/drawing/2010/main" val="0"/>
               </a:ext>
               <a:ext uri="{96DAC541-7B7A-43D3-8B79-37D633B846F1}">
-                <asvg:svgBlip xmlns:asvg="http://schemas.microsoft.com/office/drawing/2016/SVG/main" r:embed="rId2"/>
+                <asvg:svgBlip xmlns:asvg="http://schemas.microsoft.com/office/drawing/2016/SVG/main" r:embed="rId3"/>
               </a:ext>
             </a:extLst>
           </a:blip>
@@ -7891,4 +10245,299 @@
     </a:ext>
   </a:extLst>
 </a:theme>
+</file>
+
+<file path=ppt/theme/theme2.xml><?xml version="1.0" encoding="utf-8"?>
+<a:theme xmlns:a="http://schemas.openxmlformats.org/drawingml/2006/main" name="Office Theme">
+  <a:themeElements>
+    <a:clrScheme name="Office">
+      <a:dk1>
+        <a:sysClr val="windowText" lastClr="000000"/>
+      </a:dk1>
+      <a:lt1>
+        <a:sysClr val="window" lastClr="FFFFFF"/>
+      </a:lt1>
+      <a:dk2>
+        <a:srgbClr val="44546A"/>
+      </a:dk2>
+      <a:lt2>
+        <a:srgbClr val="E7E6E6"/>
+      </a:lt2>
+      <a:accent1>
+        <a:srgbClr val="4472C4"/>
+      </a:accent1>
+      <a:accent2>
+        <a:srgbClr val="ED7D31"/>
+      </a:accent2>
+      <a:accent3>
+        <a:srgbClr val="A5A5A5"/>
+      </a:accent3>
+      <a:accent4>
+        <a:srgbClr val="FFC000"/>
+      </a:accent4>
+      <a:accent5>
+        <a:srgbClr val="5B9BD5"/>
+      </a:accent5>
+      <a:accent6>
+        <a:srgbClr val="70AD47"/>
+      </a:accent6>
+      <a:hlink>
+        <a:srgbClr val="0563C1"/>
+      </a:hlink>
+      <a:folHlink>
+        <a:srgbClr val="954F72"/>
+      </a:folHlink>
+    </a:clrScheme>
+    <a:fontScheme name="Office">
+      <a:majorFont>
+        <a:latin typeface="Calibri Light" panose="020F0302020204030204"/>
+        <a:ea typeface=""/>
+        <a:cs typeface=""/>
+        <a:font script="Jpan" typeface="游ゴシック Light"/>
+        <a:font script="Hang" typeface="맑은 고딕"/>
+        <a:font script="Hans" typeface="等线 Light"/>
+        <a:font script="Hant" typeface="新細明體"/>
+        <a:font script="Arab" typeface="Times New Roman"/>
+        <a:font script="Hebr" typeface="Times New Roman"/>
+        <a:font script="Thai" typeface="Angsana New"/>
+        <a:font script="Ethi" typeface="Nyala"/>
+        <a:font script="Beng" typeface="Vrinda"/>
+        <a:font script="Gujr" typeface="Shruti"/>
+        <a:font script="Khmr" typeface="MoolBoran"/>
+        <a:font script="Knda" typeface="Tunga"/>
+        <a:font script="Guru" typeface="Raavi"/>
+        <a:font script="Cans" typeface="Euphemia"/>
+        <a:font script="Cher" typeface="Plantagenet Cherokee"/>
+        <a:font script="Yiii" typeface="Microsoft Yi Baiti"/>
+        <a:font script="Tibt" typeface="Microsoft Himalaya"/>
+        <a:font script="Thaa" typeface="MV Boli"/>
+        <a:font script="Deva" typeface="Mangal"/>
+        <a:font script="Telu" typeface="Gautami"/>
+        <a:font script="Taml" typeface="Latha"/>
+        <a:font script="Syrc" typeface="Estrangelo Edessa"/>
+        <a:font script="Orya" typeface="Kalinga"/>
+        <a:font script="Mlym" typeface="Kartika"/>
+        <a:font script="Laoo" typeface="DokChampa"/>
+        <a:font script="Sinh" typeface="Iskoola Pota"/>
+        <a:font script="Mong" typeface="Mongolian Baiti"/>
+        <a:font script="Viet" typeface="Times New Roman"/>
+        <a:font script="Uigh" typeface="Microsoft Uighur"/>
+        <a:font script="Geor" typeface="Sylfaen"/>
+        <a:font script="Armn" typeface="Arial"/>
+        <a:font script="Bugi" typeface="Leelawadee UI"/>
+        <a:font script="Bopo" typeface="Microsoft JhengHei"/>
+        <a:font script="Java" typeface="Javanese Text"/>
+        <a:font script="Lisu" typeface="Segoe UI"/>
+        <a:font script="Mymr" typeface="Myanmar Text"/>
+        <a:font script="Nkoo" typeface="Ebrima"/>
+        <a:font script="Olck" typeface="Nirmala UI"/>
+        <a:font script="Osma" typeface="Ebrima"/>
+        <a:font script="Phag" typeface="Phagspa"/>
+        <a:font script="Syrn" typeface="Estrangelo Edessa"/>
+        <a:font script="Syrj" typeface="Estrangelo Edessa"/>
+        <a:font script="Syre" typeface="Estrangelo Edessa"/>
+        <a:font script="Sora" typeface="Nirmala UI"/>
+        <a:font script="Tale" typeface="Microsoft Tai Le"/>
+        <a:font script="Talu" typeface="Microsoft New Tai Lue"/>
+        <a:font script="Tfng" typeface="Ebrima"/>
+      </a:majorFont>
+      <a:minorFont>
+        <a:latin typeface="Calibri" panose="020F0502020204030204"/>
+        <a:ea typeface=""/>
+        <a:cs typeface=""/>
+        <a:font script="Jpan" typeface="游ゴシック"/>
+        <a:font script="Hang" typeface="맑은 고딕"/>
+        <a:font script="Hans" typeface="等线"/>
+        <a:font script="Hant" typeface="新細明體"/>
+        <a:font script="Arab" typeface="Arial"/>
+        <a:font script="Hebr" typeface="Arial"/>
+        <a:font script="Thai" typeface="Cordia New"/>
+        <a:font script="Ethi" typeface="Nyala"/>
+        <a:font script="Beng" typeface="Vrinda"/>
+        <a:font script="Gujr" typeface="Shruti"/>
+        <a:font script="Khmr" typeface="DaunPenh"/>
+        <a:font script="Knda" typeface="Tunga"/>
+        <a:font script="Guru" typeface="Raavi"/>
+        <a:font script="Cans" typeface="Euphemia"/>
+        <a:font script="Cher" typeface="Plantagenet Cherokee"/>
+        <a:font script="Yiii" typeface="Microsoft Yi Baiti"/>
+        <a:font script="Tibt" typeface="Microsoft Himalaya"/>
+        <a:font script="Thaa" typeface="MV Boli"/>
+        <a:font script="Deva" typeface="Mangal"/>
+        <a:font script="Telu" typeface="Gautami"/>
+        <a:font script="Taml" typeface="Latha"/>
+        <a:font script="Syrc" typeface="Estrangelo Edessa"/>
+        <a:font script="Orya" typeface="Kalinga"/>
+        <a:font script="Mlym" typeface="Kartika"/>
+        <a:font script="Laoo" typeface="DokChampa"/>
+        <a:font script="Sinh" typeface="Iskoola Pota"/>
+        <a:font script="Mong" typeface="Mongolian Baiti"/>
+        <a:font script="Viet" typeface="Arial"/>
+        <a:font script="Uigh" typeface="Microsoft Uighur"/>
+        <a:font script="Geor" typeface="Sylfaen"/>
+        <a:font script="Armn" typeface="Arial"/>
+        <a:font script="Bugi" typeface="Leelawadee UI"/>
+        <a:font script="Bopo" typeface="Microsoft JhengHei"/>
+        <a:font script="Java" typeface="Javanese Text"/>
+        <a:font script="Lisu" typeface="Segoe UI"/>
+        <a:font script="Mymr" typeface="Myanmar Text"/>
+        <a:font script="Nkoo" typeface="Ebrima"/>
+        <a:font script="Olck" typeface="Nirmala UI"/>
+        <a:font script="Osma" typeface="Ebrima"/>
+        <a:font script="Phag" typeface="Phagspa"/>
+        <a:font script="Syrn" typeface="Estrangelo Edessa"/>
+        <a:font script="Syrj" typeface="Estrangelo Edessa"/>
+        <a:font script="Syre" typeface="Estrangelo Edessa"/>
+        <a:font script="Sora" typeface="Nirmala UI"/>
+        <a:font script="Tale" typeface="Microsoft Tai Le"/>
+        <a:font script="Talu" typeface="Microsoft New Tai Lue"/>
+        <a:font script="Tfng" typeface="Ebrima"/>
+      </a:minorFont>
+    </a:fontScheme>
+    <a:fmtScheme name="Office">
+      <a:fillStyleLst>
+        <a:solidFill>
+          <a:schemeClr val="phClr"/>
+        </a:solidFill>
+        <a:gradFill rotWithShape="1">
+          <a:gsLst>
+            <a:gs pos="0">
+              <a:schemeClr val="phClr">
+                <a:lumMod val="110000"/>
+                <a:satMod val="105000"/>
+                <a:tint val="67000"/>
+              </a:schemeClr>
+            </a:gs>
+            <a:gs pos="50000">
+              <a:schemeClr val="phClr">
+                <a:lumMod val="105000"/>
+                <a:satMod val="103000"/>
+                <a:tint val="73000"/>
+              </a:schemeClr>
+            </a:gs>
+            <a:gs pos="100000">
+              <a:schemeClr val="phClr">
+                <a:lumMod val="105000"/>
+                <a:satMod val="109000"/>
+                <a:tint val="81000"/>
+              </a:schemeClr>
+            </a:gs>
+          </a:gsLst>
+          <a:lin ang="5400000" scaled="0"/>
+        </a:gradFill>
+        <a:gradFill rotWithShape="1">
+          <a:gsLst>
+            <a:gs pos="0">
+              <a:schemeClr val="phClr">
+                <a:satMod val="103000"/>
+                <a:lumMod val="102000"/>
+                <a:tint val="94000"/>
+              </a:schemeClr>
+            </a:gs>
+            <a:gs pos="50000">
+              <a:schemeClr val="phClr">
+                <a:satMod val="110000"/>
+                <a:lumMod val="100000"/>
+                <a:shade val="100000"/>
+              </a:schemeClr>
+            </a:gs>
+            <a:gs pos="100000">
+              <a:schemeClr val="phClr">
+                <a:lumMod val="99000"/>
+                <a:satMod val="120000"/>
+                <a:shade val="78000"/>
+              </a:schemeClr>
+            </a:gs>
+          </a:gsLst>
+          <a:lin ang="5400000" scaled="0"/>
+        </a:gradFill>
+      </a:fillStyleLst>
+      <a:lnStyleLst>
+        <a:ln w="6350" cap="flat" cmpd="sng" algn="ctr">
+          <a:solidFill>
+            <a:schemeClr val="phClr"/>
+          </a:solidFill>
+          <a:prstDash val="solid"/>
+          <a:miter lim="800000"/>
+        </a:ln>
+        <a:ln w="12700" cap="flat" cmpd="sng" algn="ctr">
+          <a:solidFill>
+            <a:schemeClr val="phClr"/>
+          </a:solidFill>
+          <a:prstDash val="solid"/>
+          <a:miter lim="800000"/>
+        </a:ln>
+        <a:ln w="19050" cap="flat" cmpd="sng" algn="ctr">
+          <a:solidFill>
+            <a:schemeClr val="phClr"/>
+          </a:solidFill>
+          <a:prstDash val="solid"/>
+          <a:miter lim="800000"/>
+        </a:ln>
+      </a:lnStyleLst>
+      <a:effectStyleLst>
+        <a:effectStyle>
+          <a:effectLst/>
+        </a:effectStyle>
+        <a:effectStyle>
+          <a:effectLst/>
+        </a:effectStyle>
+        <a:effectStyle>
+          <a:effectLst>
+            <a:outerShdw blurRad="57150" dist="19050" dir="5400000" algn="ctr" rotWithShape="0">
+              <a:srgbClr val="000000">
+                <a:alpha val="63000"/>
+              </a:srgbClr>
+            </a:outerShdw>
+          </a:effectLst>
+        </a:effectStyle>
+      </a:effectStyleLst>
+      <a:bgFillStyleLst>
+        <a:solidFill>
+          <a:schemeClr val="phClr"/>
+        </a:solidFill>
+        <a:solidFill>
+          <a:schemeClr val="phClr">
+            <a:tint val="95000"/>
+            <a:satMod val="170000"/>
+          </a:schemeClr>
+        </a:solidFill>
+        <a:gradFill rotWithShape="1">
+          <a:gsLst>
+            <a:gs pos="0">
+              <a:schemeClr val="phClr">
+                <a:tint val="93000"/>
+                <a:satMod val="150000"/>
+                <a:shade val="98000"/>
+                <a:lumMod val="102000"/>
+              </a:schemeClr>
+            </a:gs>
+            <a:gs pos="50000">
+              <a:schemeClr val="phClr">
+                <a:tint val="98000"/>
+                <a:satMod val="130000"/>
+                <a:shade val="90000"/>
+                <a:lumMod val="103000"/>
+              </a:schemeClr>
+            </a:gs>
+            <a:gs pos="100000">
+              <a:schemeClr val="phClr">
+                <a:shade val="63000"/>
+                <a:satMod val="120000"/>
+              </a:schemeClr>
+            </a:gs>
+          </a:gsLst>
+          <a:lin ang="5400000" scaled="0"/>
+        </a:gradFill>
+      </a:bgFillStyleLst>
+    </a:fmtScheme>
+  </a:themeElements>
+  <a:objectDefaults/>
+  <a:extraClrSchemeLst/>
+  <a:extLst>
+    <a:ext uri="{05A4C25C-085E-4340-85A3-A5531E510DB2}">
+      <thm15:themeFamily xmlns:thm15="http://schemas.microsoft.com/office/thememl/2012/main" name="Office Theme" id="{62F939B6-93AF-4DB8-9C6B-D6C7DFDC589F}" vid="{4A3C46E8-61CC-4603-A589-7422A47A8E4A}"/>
+    </a:ext>
+  </a:extLst>
+</a:theme>
 </file>
--- a/presentation/IKT NoSql Sql Elastic Search.pptx
+++ b/presentation/IKT NoSql Sql Elastic Search.pptx
@@ -634,7 +634,7 @@
       </p:grpSpPr>
       <p:sp>
         <p:nvSpPr>
-          <p:cNvPr id="2" name="Slide Image Placeholder 1"/>
+          <p:cNvPr id="2" name="Diakép helye 1"/>
           <p:cNvSpPr>
             <a:spLocks noGrp="1" noRot="1" noChangeAspect="1"/>
           </p:cNvSpPr>
@@ -646,7 +646,7 @@
       </p:sp>
       <p:sp>
         <p:nvSpPr>
-          <p:cNvPr id="3" name="Notes Placeholder 2"/>
+          <p:cNvPr id="3" name="Jegyzetek helye 2"/>
           <p:cNvSpPr>
             <a:spLocks noGrp="1"/>
           </p:cNvSpPr>
@@ -659,105 +659,44 @@
           <a:bodyPr/>
           <a:lstStyle/>
           <a:p>
-            <a:r>
-              <a:rPr lang="en-US" dirty="0">
-                <a:ea typeface="Calibri"/>
-                <a:cs typeface="Calibri"/>
-              </a:rPr>
-              <a:t>Redis session </a:t>
-            </a:r>
-            <a:r>
-              <a:rPr lang="en-US" dirty="0" err="1">
-                <a:ea typeface="Calibri"/>
-                <a:cs typeface="Calibri"/>
-              </a:rPr>
-              <a:t>kezeles</a:t>
-            </a:r>
-            <a:r>
-              <a:rPr lang="en-US" dirty="0">
-                <a:ea typeface="Calibri"/>
-                <a:cs typeface="Calibri"/>
-              </a:rPr>
-              <a:t>: pl </a:t>
-            </a:r>
-            <a:r>
-              <a:rPr lang="en-US" dirty="0" err="1"/>
-              <a:t>kosar</a:t>
-            </a:r>
-            <a:r>
-              <a:rPr lang="en-US" dirty="0"/>
-              <a:t> </a:t>
-            </a:r>
-            <a:r>
-              <a:rPr lang="en-US" dirty="0" err="1"/>
-              <a:t>tartalma</a:t>
-            </a:r>
-            <a:r>
-              <a:rPr lang="en-US" dirty="0"/>
-              <a:t> </a:t>
-            </a:r>
-            <a:r>
-              <a:rPr lang="en-US" dirty="0" err="1"/>
-              <a:t>webshopnal</a:t>
-            </a:r>
-            <a:r>
-              <a:rPr lang="en-US" dirty="0"/>
-              <a:t>, </a:t>
-            </a:r>
-            <a:r>
-              <a:rPr lang="en-US" dirty="0" err="1"/>
-              <a:t>az</a:t>
-            </a:r>
-            <a:r>
-              <a:rPr lang="en-US" dirty="0"/>
-              <a:t> </a:t>
-            </a:r>
-            <a:r>
-              <a:rPr lang="en-US" dirty="0" err="1"/>
-              <a:t>adatokat</a:t>
-            </a:r>
-            <a:r>
-              <a:rPr lang="en-US" dirty="0"/>
-              <a:t> </a:t>
-            </a:r>
-            <a:r>
-              <a:rPr lang="en-US" dirty="0" err="1"/>
-              <a:t>redisben</a:t>
-            </a:r>
-            <a:r>
-              <a:rPr lang="en-US" dirty="0"/>
-              <a:t> </a:t>
-            </a:r>
-            <a:r>
-              <a:rPr lang="en-US" dirty="0" err="1"/>
-              <a:t>taroljuk</a:t>
-            </a:r>
-            <a:r>
-              <a:rPr lang="en-US" dirty="0"/>
-              <a:t> </a:t>
-            </a:r>
-            <a:r>
-              <a:rPr lang="en-US" dirty="0" err="1"/>
-              <a:t>kulcs-ertek</a:t>
-            </a:r>
-            <a:r>
-              <a:rPr lang="en-US" dirty="0"/>
-              <a:t> </a:t>
-            </a:r>
-            <a:r>
-              <a:rPr lang="en-US" dirty="0" err="1"/>
-              <a:t>formaban</a:t>
-            </a:r>
-            <a:endParaRPr lang="en-US" dirty="0" err="1">
-              <a:ea typeface="Calibri"/>
-              <a:cs typeface="Calibri"/>
-            </a:endParaRPr>
-          </a:p>
-        </p:txBody>
-      </p:sp>
-      <p:sp>
-        <p:nvSpPr>
-          <p:cNvPr id="4" name="Slide Number Placeholder 3"/>
+            <a:pPr marL="0" marR="0" lvl="0" indent="0" algn="l" defTabSz="914400" rtl="0" eaLnBrk="1" fontAlgn="auto" latinLnBrk="0" hangingPunct="1">
+              <a:lnSpc>
+                <a:spcPct val="100000"/>
+              </a:lnSpc>
+              <a:spcBef>
+                <a:spcPts val="0"/>
+              </a:spcBef>
+              <a:spcAft>
+                <a:spcPts val="0"/>
+              </a:spcAft>
+              <a:buClrTx/>
+              <a:buSzTx/>
+              <a:buFontTx/>
+              <a:buNone/>
+              <a:tabLst/>
+              <a:defRPr/>
+            </a:pPr>
+            <a:r>
+              <a:rPr lang="hu-HU" dirty="0"/>
+              <a:t>Ebben a prezentációban az SQL és a </a:t>
+            </a:r>
+            <a:r>
+              <a:rPr lang="hu-HU" dirty="0" err="1"/>
+              <a:t>NoSQL</a:t>
+            </a:r>
+            <a:r>
+              <a:rPr lang="hu-HU" dirty="0"/>
+              <a:t> adatbázisok közötti különbségeket fogom bemutatni. Megnézzük, hogyan működnek, miben térnek el, és mikor melyiket érdemes használni.</a:t>
+            </a:r>
+          </a:p>
+          <a:p>
+            <a:endParaRPr lang="hu-HU" dirty="0"/>
+          </a:p>
+        </p:txBody>
+      </p:sp>
+      <p:sp>
+        <p:nvSpPr>
+          <p:cNvPr id="4" name="Dia számának helye 3"/>
           <p:cNvSpPr>
             <a:spLocks noGrp="1"/>
           </p:cNvSpPr>
@@ -771,16 +710,17 @@
           <a:lstStyle/>
           <a:p>
             <a:fld id="{677C16E7-616B-4EA5-B3CE-600F8FF71826}" type="slidenum">
-              <a:t>6</a:t>
+              <a:rPr lang="hu-HU" smtClean="0"/>
+              <a:t>1</a:t>
             </a:fld>
-            <a:endParaRPr lang="en-US"/>
+            <a:endParaRPr lang="hu-HU"/>
           </a:p>
         </p:txBody>
       </p:sp>
     </p:spTree>
     <p:extLst>
       <p:ext uri="{BB962C8B-B14F-4D97-AF65-F5344CB8AC3E}">
-        <p14:creationId xmlns:p14="http://schemas.microsoft.com/office/powerpoint/2010/main" val="2672188538"/>
+        <p14:creationId xmlns:p14="http://schemas.microsoft.com/office/powerpoint/2010/main" val="3154874331"/>
       </p:ext>
     </p:extLst>
   </p:cSld>
@@ -809,6 +749,588 @@
       </p:grpSpPr>
       <p:sp>
         <p:nvSpPr>
+          <p:cNvPr id="2" name="Diakép helye 1"/>
+          <p:cNvSpPr>
+            <a:spLocks noGrp="1" noRot="1" noChangeAspect="1"/>
+          </p:cNvSpPr>
+          <p:nvPr>
+            <p:ph type="sldImg"/>
+          </p:nvPr>
+        </p:nvSpPr>
+        <p:spPr/>
+      </p:sp>
+      <p:sp>
+        <p:nvSpPr>
+          <p:cNvPr id="3" name="Jegyzetek helye 2"/>
+          <p:cNvSpPr>
+            <a:spLocks noGrp="1"/>
+          </p:cNvSpPr>
+          <p:nvPr>
+            <p:ph type="body" idx="1"/>
+          </p:nvPr>
+        </p:nvSpPr>
+        <p:spPr/>
+        <p:txBody>
+          <a:bodyPr/>
+          <a:lstStyle/>
+          <a:p>
+            <a:r>
+              <a:rPr lang="hu-HU" dirty="0"/>
+              <a:t>Az SQL egy relációs adatbázis típus, ami táblákban tárolja az adatokat. Ezek az adatok strukturáltak, vagyis előre meghatározott formátumban vannak. Gyakori példák a </a:t>
+            </a:r>
+            <a:r>
+              <a:rPr lang="hu-HU" dirty="0" err="1"/>
+              <a:t>MySQL</a:t>
+            </a:r>
+            <a:r>
+              <a:rPr lang="hu-HU" dirty="0"/>
+              <a:t> és a </a:t>
+            </a:r>
+            <a:r>
+              <a:rPr lang="hu-HU" dirty="0" err="1"/>
+              <a:t>SQLite</a:t>
+            </a:r>
+            <a:r>
+              <a:rPr lang="hu-HU" dirty="0"/>
+              <a:t>.</a:t>
+            </a:r>
+          </a:p>
+        </p:txBody>
+      </p:sp>
+      <p:sp>
+        <p:nvSpPr>
+          <p:cNvPr id="4" name="Dia számának helye 3"/>
+          <p:cNvSpPr>
+            <a:spLocks noGrp="1"/>
+          </p:cNvSpPr>
+          <p:nvPr>
+            <p:ph type="sldNum" sz="quarter" idx="5"/>
+          </p:nvPr>
+        </p:nvSpPr>
+        <p:spPr/>
+        <p:txBody>
+          <a:bodyPr/>
+          <a:lstStyle/>
+          <a:p>
+            <a:fld id="{677C16E7-616B-4EA5-B3CE-600F8FF71826}" type="slidenum">
+              <a:rPr lang="hu-HU" smtClean="0"/>
+              <a:t>2</a:t>
+            </a:fld>
+            <a:endParaRPr lang="hu-HU"/>
+          </a:p>
+        </p:txBody>
+      </p:sp>
+    </p:spTree>
+    <p:extLst>
+      <p:ext uri="{BB962C8B-B14F-4D97-AF65-F5344CB8AC3E}">
+        <p14:creationId xmlns:p14="http://schemas.microsoft.com/office/powerpoint/2010/main" val="1193379161"/>
+      </p:ext>
+    </p:extLst>
+  </p:cSld>
+  <p:clrMapOvr>
+    <a:masterClrMapping/>
+  </p:clrMapOvr>
+</p:notes>
+</file>
+
+<file path=ppt/notesSlides/notesSlide3.xml><?xml version="1.0" encoding="utf-8"?>
+<p:notes xmlns:a="http://schemas.openxmlformats.org/drawingml/2006/main" xmlns:r="http://schemas.openxmlformats.org/officeDocument/2006/relationships" xmlns:p="http://schemas.openxmlformats.org/presentationml/2006/main">
+  <p:cSld>
+    <p:spTree>
+      <p:nvGrpSpPr>
+        <p:cNvPr id="1" name=""/>
+        <p:cNvGrpSpPr/>
+        <p:nvPr/>
+      </p:nvGrpSpPr>
+      <p:grpSpPr>
+        <a:xfrm>
+          <a:off x="0" y="0"/>
+          <a:ext cx="0" cy="0"/>
+          <a:chOff x="0" y="0"/>
+          <a:chExt cx="0" cy="0"/>
+        </a:xfrm>
+      </p:grpSpPr>
+      <p:sp>
+        <p:nvSpPr>
+          <p:cNvPr id="2" name="Diakép helye 1"/>
+          <p:cNvSpPr>
+            <a:spLocks noGrp="1" noRot="1" noChangeAspect="1"/>
+          </p:cNvSpPr>
+          <p:nvPr>
+            <p:ph type="sldImg"/>
+          </p:nvPr>
+        </p:nvSpPr>
+        <p:spPr/>
+      </p:sp>
+      <p:sp>
+        <p:nvSpPr>
+          <p:cNvPr id="3" name="Jegyzetek helye 2"/>
+          <p:cNvSpPr>
+            <a:spLocks noGrp="1"/>
+          </p:cNvSpPr>
+          <p:nvPr>
+            <p:ph type="body" idx="1"/>
+          </p:nvPr>
+        </p:nvSpPr>
+        <p:spPr/>
+        <p:txBody>
+          <a:bodyPr/>
+          <a:lstStyle/>
+          <a:p>
+            <a:endParaRPr lang="hu-HU" dirty="0"/>
+          </a:p>
+        </p:txBody>
+      </p:sp>
+      <p:sp>
+        <p:nvSpPr>
+          <p:cNvPr id="4" name="Dia számának helye 3"/>
+          <p:cNvSpPr>
+            <a:spLocks noGrp="1"/>
+          </p:cNvSpPr>
+          <p:nvPr>
+            <p:ph type="sldNum" sz="quarter" idx="5"/>
+          </p:nvPr>
+        </p:nvSpPr>
+        <p:spPr/>
+        <p:txBody>
+          <a:bodyPr/>
+          <a:lstStyle/>
+          <a:p>
+            <a:fld id="{677C16E7-616B-4EA5-B3CE-600F8FF71826}" type="slidenum">
+              <a:rPr lang="hu-HU" smtClean="0"/>
+              <a:t>3</a:t>
+            </a:fld>
+            <a:endParaRPr lang="hu-HU"/>
+          </a:p>
+        </p:txBody>
+      </p:sp>
+    </p:spTree>
+    <p:extLst>
+      <p:ext uri="{BB962C8B-B14F-4D97-AF65-F5344CB8AC3E}">
+        <p14:creationId xmlns:p14="http://schemas.microsoft.com/office/powerpoint/2010/main" val="3796345244"/>
+      </p:ext>
+    </p:extLst>
+  </p:cSld>
+  <p:clrMapOvr>
+    <a:masterClrMapping/>
+  </p:clrMapOvr>
+</p:notes>
+</file>
+
+<file path=ppt/notesSlides/notesSlide4.xml><?xml version="1.0" encoding="utf-8"?>
+<p:notes xmlns:a="http://schemas.openxmlformats.org/drawingml/2006/main" xmlns:r="http://schemas.openxmlformats.org/officeDocument/2006/relationships" xmlns:p="http://schemas.openxmlformats.org/presentationml/2006/main">
+  <p:cSld>
+    <p:spTree>
+      <p:nvGrpSpPr>
+        <p:cNvPr id="1" name=""/>
+        <p:cNvGrpSpPr/>
+        <p:nvPr/>
+      </p:nvGrpSpPr>
+      <p:grpSpPr>
+        <a:xfrm>
+          <a:off x="0" y="0"/>
+          <a:ext cx="0" cy="0"/>
+          <a:chOff x="0" y="0"/>
+          <a:chExt cx="0" cy="0"/>
+        </a:xfrm>
+      </p:grpSpPr>
+      <p:sp>
+        <p:nvSpPr>
+          <p:cNvPr id="2" name="Diakép helye 1"/>
+          <p:cNvSpPr>
+            <a:spLocks noGrp="1" noRot="1" noChangeAspect="1"/>
+          </p:cNvSpPr>
+          <p:nvPr>
+            <p:ph type="sldImg"/>
+          </p:nvPr>
+        </p:nvSpPr>
+        <p:spPr/>
+      </p:sp>
+      <p:sp>
+        <p:nvSpPr>
+          <p:cNvPr id="3" name="Jegyzetek helye 2"/>
+          <p:cNvSpPr>
+            <a:spLocks noGrp="1"/>
+          </p:cNvSpPr>
+          <p:nvPr>
+            <p:ph type="body" idx="1"/>
+          </p:nvPr>
+        </p:nvSpPr>
+        <p:spPr/>
+        <p:txBody>
+          <a:bodyPr/>
+          <a:lstStyle/>
+          <a:p>
+            <a:r>
+              <a:rPr lang="hu-HU" dirty="0"/>
+              <a:t>A </a:t>
+            </a:r>
+            <a:r>
+              <a:rPr lang="hu-HU" dirty="0" err="1"/>
+              <a:t>NoSQL</a:t>
+            </a:r>
+            <a:r>
+              <a:rPr lang="hu-HU" dirty="0"/>
+              <a:t> adatbázisok nem </a:t>
+            </a:r>
+            <a:r>
+              <a:rPr lang="hu-HU" dirty="0" err="1"/>
+              <a:t>relációsak</a:t>
+            </a:r>
+            <a:r>
+              <a:rPr lang="hu-HU" dirty="0"/>
+              <a:t>, tehát nem táblákban tárolják az adatokat. Sokkal rugalmasabbak, például JSON formátumban dolgoznak. Ez jól jön, ha az adatok szerkezete gyakran változik.</a:t>
+            </a:r>
+          </a:p>
+          <a:p>
+            <a:endParaRPr lang="hu-HU" dirty="0"/>
+          </a:p>
+          <a:p>
+            <a:endParaRPr lang="hu-HU" dirty="0"/>
+          </a:p>
+        </p:txBody>
+      </p:sp>
+      <p:sp>
+        <p:nvSpPr>
+          <p:cNvPr id="4" name="Dia számának helye 3"/>
+          <p:cNvSpPr>
+            <a:spLocks noGrp="1"/>
+          </p:cNvSpPr>
+          <p:nvPr>
+            <p:ph type="sldNum" sz="quarter" idx="5"/>
+          </p:nvPr>
+        </p:nvSpPr>
+        <p:spPr/>
+        <p:txBody>
+          <a:bodyPr/>
+          <a:lstStyle/>
+          <a:p>
+            <a:fld id="{677C16E7-616B-4EA5-B3CE-600F8FF71826}" type="slidenum">
+              <a:rPr lang="hu-HU" smtClean="0"/>
+              <a:t>4</a:t>
+            </a:fld>
+            <a:endParaRPr lang="hu-HU"/>
+          </a:p>
+        </p:txBody>
+      </p:sp>
+    </p:spTree>
+    <p:extLst>
+      <p:ext uri="{BB962C8B-B14F-4D97-AF65-F5344CB8AC3E}">
+        <p14:creationId xmlns:p14="http://schemas.microsoft.com/office/powerpoint/2010/main" val="4277845395"/>
+      </p:ext>
+    </p:extLst>
+  </p:cSld>
+  <p:clrMapOvr>
+    <a:masterClrMapping/>
+  </p:clrMapOvr>
+</p:notes>
+</file>
+
+<file path=ppt/notesSlides/notesSlide5.xml><?xml version="1.0" encoding="utf-8"?>
+<p:notes xmlns:a="http://schemas.openxmlformats.org/drawingml/2006/main" xmlns:r="http://schemas.openxmlformats.org/officeDocument/2006/relationships" xmlns:p="http://schemas.openxmlformats.org/presentationml/2006/main">
+  <p:cSld>
+    <p:spTree>
+      <p:nvGrpSpPr>
+        <p:cNvPr id="1" name=""/>
+        <p:cNvGrpSpPr/>
+        <p:nvPr/>
+      </p:nvGrpSpPr>
+      <p:grpSpPr>
+        <a:xfrm>
+          <a:off x="0" y="0"/>
+          <a:ext cx="0" cy="0"/>
+          <a:chOff x="0" y="0"/>
+          <a:chExt cx="0" cy="0"/>
+        </a:xfrm>
+      </p:grpSpPr>
+      <p:sp>
+        <p:nvSpPr>
+          <p:cNvPr id="2" name="Diakép helye 1"/>
+          <p:cNvSpPr>
+            <a:spLocks noGrp="1" noRot="1" noChangeAspect="1"/>
+          </p:cNvSpPr>
+          <p:nvPr>
+            <p:ph type="sldImg"/>
+          </p:nvPr>
+        </p:nvSpPr>
+        <p:spPr/>
+      </p:sp>
+      <p:sp>
+        <p:nvSpPr>
+          <p:cNvPr id="3" name="Jegyzetek helye 2"/>
+          <p:cNvSpPr>
+            <a:spLocks noGrp="1"/>
+          </p:cNvSpPr>
+          <p:nvPr>
+            <p:ph type="body" idx="1"/>
+          </p:nvPr>
+        </p:nvSpPr>
+        <p:spPr/>
+        <p:txBody>
+          <a:bodyPr/>
+          <a:lstStyle/>
+          <a:p>
+            <a:r>
+              <a:rPr lang="hu-HU" dirty="0"/>
+              <a:t>A legfontosabb különbség, hogy az SQL fix sémát használ, míg a </a:t>
+            </a:r>
+            <a:r>
+              <a:rPr lang="hu-HU" dirty="0" err="1"/>
+              <a:t>NoSQL</a:t>
+            </a:r>
+            <a:r>
+              <a:rPr lang="hu-HU" dirty="0"/>
+              <a:t> </a:t>
+            </a:r>
+            <a:r>
+              <a:rPr lang="hu-HU" dirty="0" err="1"/>
+              <a:t>rugalmasat</a:t>
+            </a:r>
+            <a:r>
+              <a:rPr lang="hu-HU" dirty="0"/>
+              <a:t>. Az SQL erős a bonyolult lekérdezésekben, a </a:t>
+            </a:r>
+            <a:r>
+              <a:rPr lang="hu-HU" dirty="0" err="1"/>
+              <a:t>NoSQL</a:t>
+            </a:r>
+            <a:r>
+              <a:rPr lang="hu-HU" dirty="0"/>
+              <a:t> pedig gyorsabb és jobban skálázható nagy adatmennyiségnél.</a:t>
+            </a:r>
+          </a:p>
+        </p:txBody>
+      </p:sp>
+      <p:sp>
+        <p:nvSpPr>
+          <p:cNvPr id="4" name="Dia számának helye 3"/>
+          <p:cNvSpPr>
+            <a:spLocks noGrp="1"/>
+          </p:cNvSpPr>
+          <p:nvPr>
+            <p:ph type="sldNum" sz="quarter" idx="5"/>
+          </p:nvPr>
+        </p:nvSpPr>
+        <p:spPr/>
+        <p:txBody>
+          <a:bodyPr/>
+          <a:lstStyle/>
+          <a:p>
+            <a:fld id="{677C16E7-616B-4EA5-B3CE-600F8FF71826}" type="slidenum">
+              <a:rPr lang="hu-HU" smtClean="0"/>
+              <a:t>5</a:t>
+            </a:fld>
+            <a:endParaRPr lang="hu-HU"/>
+          </a:p>
+        </p:txBody>
+      </p:sp>
+    </p:spTree>
+    <p:extLst>
+      <p:ext uri="{BB962C8B-B14F-4D97-AF65-F5344CB8AC3E}">
+        <p14:creationId xmlns:p14="http://schemas.microsoft.com/office/powerpoint/2010/main" val="2621211165"/>
+      </p:ext>
+    </p:extLst>
+  </p:cSld>
+  <p:clrMapOvr>
+    <a:masterClrMapping/>
+  </p:clrMapOvr>
+</p:notes>
+</file>
+
+<file path=ppt/notesSlides/notesSlide6.xml><?xml version="1.0" encoding="utf-8"?>
+<p:notes xmlns:a="http://schemas.openxmlformats.org/drawingml/2006/main" xmlns:r="http://schemas.openxmlformats.org/officeDocument/2006/relationships" xmlns:p="http://schemas.openxmlformats.org/presentationml/2006/main">
+  <p:cSld>
+    <p:spTree>
+      <p:nvGrpSpPr>
+        <p:cNvPr id="1" name=""/>
+        <p:cNvGrpSpPr/>
+        <p:nvPr/>
+      </p:nvGrpSpPr>
+      <p:grpSpPr>
+        <a:xfrm>
+          <a:off x="0" y="0"/>
+          <a:ext cx="0" cy="0"/>
+          <a:chOff x="0" y="0"/>
+          <a:chExt cx="0" cy="0"/>
+        </a:xfrm>
+      </p:grpSpPr>
+      <p:sp>
+        <p:nvSpPr>
+          <p:cNvPr id="2" name="Slide Image Placeholder 1"/>
+          <p:cNvSpPr>
+            <a:spLocks noGrp="1" noRot="1" noChangeAspect="1"/>
+          </p:cNvSpPr>
+          <p:nvPr>
+            <p:ph type="sldImg"/>
+          </p:nvPr>
+        </p:nvSpPr>
+        <p:spPr/>
+      </p:sp>
+      <p:sp>
+        <p:nvSpPr>
+          <p:cNvPr id="3" name="Notes Placeholder 2"/>
+          <p:cNvSpPr>
+            <a:spLocks noGrp="1"/>
+          </p:cNvSpPr>
+          <p:nvPr>
+            <p:ph type="body" idx="1"/>
+          </p:nvPr>
+        </p:nvSpPr>
+        <p:spPr/>
+        <p:txBody>
+          <a:bodyPr/>
+          <a:lstStyle/>
+          <a:p>
+            <a:r>
+              <a:rPr lang="en-US" dirty="0">
+                <a:ea typeface="Calibri"/>
+                <a:cs typeface="Calibri"/>
+              </a:rPr>
+              <a:t>Redis session </a:t>
+            </a:r>
+            <a:r>
+              <a:rPr lang="en-US" dirty="0" err="1">
+                <a:ea typeface="Calibri"/>
+                <a:cs typeface="Calibri"/>
+              </a:rPr>
+              <a:t>kezeles</a:t>
+            </a:r>
+            <a:r>
+              <a:rPr lang="en-US" dirty="0">
+                <a:ea typeface="Calibri"/>
+                <a:cs typeface="Calibri"/>
+              </a:rPr>
+              <a:t>: pl </a:t>
+            </a:r>
+            <a:r>
+              <a:rPr lang="en-US" dirty="0" err="1"/>
+              <a:t>kosar</a:t>
+            </a:r>
+            <a:r>
+              <a:rPr lang="en-US" dirty="0"/>
+              <a:t> </a:t>
+            </a:r>
+            <a:r>
+              <a:rPr lang="en-US" dirty="0" err="1"/>
+              <a:t>tartalma</a:t>
+            </a:r>
+            <a:r>
+              <a:rPr lang="en-US" dirty="0"/>
+              <a:t> </a:t>
+            </a:r>
+            <a:r>
+              <a:rPr lang="en-US" dirty="0" err="1"/>
+              <a:t>webshopnal</a:t>
+            </a:r>
+            <a:r>
+              <a:rPr lang="en-US" dirty="0"/>
+              <a:t>, </a:t>
+            </a:r>
+            <a:r>
+              <a:rPr lang="en-US" dirty="0" err="1"/>
+              <a:t>az</a:t>
+            </a:r>
+            <a:r>
+              <a:rPr lang="en-US" dirty="0"/>
+              <a:t> </a:t>
+            </a:r>
+            <a:r>
+              <a:rPr lang="en-US" dirty="0" err="1"/>
+              <a:t>adatokat</a:t>
+            </a:r>
+            <a:r>
+              <a:rPr lang="en-US" dirty="0"/>
+              <a:t> </a:t>
+            </a:r>
+            <a:r>
+              <a:rPr lang="en-US" dirty="0" err="1"/>
+              <a:t>redisben</a:t>
+            </a:r>
+            <a:r>
+              <a:rPr lang="en-US" dirty="0"/>
+              <a:t> </a:t>
+            </a:r>
+            <a:r>
+              <a:rPr lang="en-US" dirty="0" err="1"/>
+              <a:t>taroljuk</a:t>
+            </a:r>
+            <a:r>
+              <a:rPr lang="en-US" dirty="0"/>
+              <a:t> </a:t>
+            </a:r>
+            <a:r>
+              <a:rPr lang="en-US" dirty="0" err="1"/>
+              <a:t>kulcs-ertek</a:t>
+            </a:r>
+            <a:r>
+              <a:rPr lang="en-US" dirty="0"/>
+              <a:t> </a:t>
+            </a:r>
+            <a:r>
+              <a:rPr lang="en-US" dirty="0" err="1"/>
+              <a:t>formaban</a:t>
+            </a:r>
+            <a:endParaRPr lang="en-US" dirty="0" err="1">
+              <a:ea typeface="Calibri"/>
+              <a:cs typeface="Calibri"/>
+            </a:endParaRPr>
+          </a:p>
+        </p:txBody>
+      </p:sp>
+      <p:sp>
+        <p:nvSpPr>
+          <p:cNvPr id="4" name="Slide Number Placeholder 3"/>
+          <p:cNvSpPr>
+            <a:spLocks noGrp="1"/>
+          </p:cNvSpPr>
+          <p:nvPr>
+            <p:ph type="sldNum" sz="quarter" idx="5"/>
+          </p:nvPr>
+        </p:nvSpPr>
+        <p:spPr/>
+        <p:txBody>
+          <a:bodyPr/>
+          <a:lstStyle/>
+          <a:p>
+            <a:fld id="{677C16E7-616B-4EA5-B3CE-600F8FF71826}" type="slidenum">
+              <a:t>6</a:t>
+            </a:fld>
+            <a:endParaRPr lang="en-US"/>
+          </a:p>
+        </p:txBody>
+      </p:sp>
+    </p:spTree>
+    <p:extLst>
+      <p:ext uri="{BB962C8B-B14F-4D97-AF65-F5344CB8AC3E}">
+        <p14:creationId xmlns:p14="http://schemas.microsoft.com/office/powerpoint/2010/main" val="2672188538"/>
+      </p:ext>
+    </p:extLst>
+  </p:cSld>
+  <p:clrMapOvr>
+    <a:masterClrMapping/>
+  </p:clrMapOvr>
+</p:notes>
+</file>
+
+<file path=ppt/notesSlides/notesSlide7.xml><?xml version="1.0" encoding="utf-8"?>
+<p:notes xmlns:a="http://schemas.openxmlformats.org/drawingml/2006/main" xmlns:r="http://schemas.openxmlformats.org/officeDocument/2006/relationships" xmlns:p="http://schemas.openxmlformats.org/presentationml/2006/main">
+  <p:cSld>
+    <p:spTree>
+      <p:nvGrpSpPr>
+        <p:cNvPr id="1" name=""/>
+        <p:cNvGrpSpPr/>
+        <p:nvPr/>
+      </p:nvGrpSpPr>
+      <p:grpSpPr>
+        <a:xfrm>
+          <a:off x="0" y="0"/>
+          <a:ext cx="0" cy="0"/>
+          <a:chOff x="0" y="0"/>
+          <a:chExt cx="0" cy="0"/>
+        </a:xfrm>
+      </p:grpSpPr>
+      <p:sp>
+        <p:nvSpPr>
           <p:cNvPr id="2" name="Slide Image Placeholder 1"/>
           <p:cNvSpPr>
             <a:spLocks noGrp="1" noRot="1" noChangeAspect="1"/>
@@ -994,7 +1516,7 @@
 </p:notes>
 </file>
 
-<file path=ppt/notesSlides/notesSlide3.xml><?xml version="1.0" encoding="utf-8"?>
+<file path=ppt/notesSlides/notesSlide8.xml><?xml version="1.0" encoding="utf-8"?>
 <p:notes xmlns:a="http://schemas.openxmlformats.org/drawingml/2006/main" xmlns:r="http://schemas.openxmlformats.org/officeDocument/2006/relationships" xmlns:p="http://schemas.openxmlformats.org/presentationml/2006/main">
   <p:cSld>
     <p:spTree>
@@ -6269,7 +6791,7 @@
           <p:nvPr/>
         </p:nvPicPr>
         <p:blipFill>
-          <a:blip r:embed="rId2"/>
+          <a:blip r:embed="rId3"/>
           <a:srcRect t="16577" r="8" b="4315"/>
           <a:stretch>
             <a:fillRect/>
@@ -7248,7 +7770,7 @@
             </a:r>
             <a:r>
               <a:rPr lang="en-GB" dirty="0"/>
-              <a:t>: MongoDB, Redis</a:t>
+              <a:t>: MongoDB*, Redis</a:t>
             </a:r>
           </a:p>
         </p:txBody>
@@ -7289,7 +7811,7 @@
                 <a:ea typeface="+mn-lt"/>
                 <a:cs typeface="+mn-lt"/>
               </a:rPr>
-              <a:t>MongoDB – </a:t>
+              <a:t>*MongoDB – </a:t>
             </a:r>
             <a:r>
               <a:rPr lang="en-US" sz="1400" dirty="0" err="1">
@@ -8045,8 +8567,8 @@
         </p:nvSpPr>
         <p:spPr>
           <a:xfrm>
-            <a:off x="371094" y="2718054"/>
-            <a:ext cx="3438906" cy="3207258"/>
+            <a:off x="371093" y="2718054"/>
+            <a:ext cx="3680789" cy="3207258"/>
           </a:xfrm>
         </p:spPr>
         <p:txBody>
@@ -8056,46 +8578,177 @@
           <a:lstStyle/>
           <a:p>
             <a:r>
-              <a:rPr lang="en-GB" sz="1700"/>
-              <a:t>SQL: fix séma | NOSQL: rugalmas séna</a:t>
-            </a:r>
-          </a:p>
-          <a:p>
-            <a:r>
-              <a:rPr lang="en-GB" sz="1700"/>
-              <a:t>SQL: komplex lekérdezések | NOSQL: gyors olvasás/irás</a:t>
-            </a:r>
-          </a:p>
-          <a:p>
-            <a:r>
-              <a:rPr lang="en-GB" sz="1700"/>
-              <a:t>SQL: ACID | NOSQL: skálázhatóság</a:t>
-            </a:r>
-          </a:p>
-          <a:p>
-            <a:r>
-              <a:rPr lang="en-GB" sz="1700"/>
-              <a:t>SQL: strukturált | NOSQL: </a:t>
-            </a:r>
-            <a:r>
-              <a:rPr lang="en-GB" sz="1700" b="1"/>
+              <a:rPr lang="en-GB" sz="1700" b="1" dirty="0"/>
+              <a:t>SQL</a:t>
+            </a:r>
+            <a:r>
+              <a:rPr lang="en-GB" sz="1700" dirty="0"/>
+              <a:t>: fix </a:t>
+            </a:r>
+            <a:r>
+              <a:rPr lang="en-GB" sz="1700" dirty="0" err="1"/>
+              <a:t>séma</a:t>
+            </a:r>
+            <a:r>
+              <a:rPr lang="en-GB" sz="1700" dirty="0"/>
+              <a:t> | </a:t>
+            </a:r>
+            <a:r>
+              <a:rPr lang="en-GB" sz="1700" b="1" dirty="0"/>
+              <a:t>NOSQL:</a:t>
+            </a:r>
+            <a:r>
+              <a:rPr lang="en-GB" sz="1700" dirty="0"/>
+              <a:t> </a:t>
+            </a:r>
+            <a:r>
+              <a:rPr lang="en-GB" sz="1700" dirty="0" err="1"/>
+              <a:t>rugalmas</a:t>
+            </a:r>
+            <a:r>
+              <a:rPr lang="en-GB" sz="1700" dirty="0"/>
+              <a:t> </a:t>
+            </a:r>
+            <a:r>
+              <a:rPr lang="en-GB" sz="1700" dirty="0" err="1"/>
+              <a:t>séna</a:t>
+            </a:r>
+            <a:endParaRPr lang="en-GB" sz="1700" dirty="0"/>
+          </a:p>
+          <a:p>
+            <a:r>
+              <a:rPr lang="en-GB" sz="1700" b="1" dirty="0"/>
+              <a:t>SQL:</a:t>
+            </a:r>
+            <a:r>
+              <a:rPr lang="en-GB" sz="1700" dirty="0"/>
+              <a:t> </a:t>
+            </a:r>
+            <a:r>
+              <a:rPr lang="en-GB" sz="1700" dirty="0" err="1"/>
+              <a:t>komplex</a:t>
+            </a:r>
+            <a:r>
+              <a:rPr lang="en-GB" sz="1700" dirty="0"/>
+              <a:t> </a:t>
+            </a:r>
+            <a:r>
+              <a:rPr lang="en-GB" sz="1700" dirty="0" err="1"/>
+              <a:t>lekérdezések</a:t>
+            </a:r>
+            <a:r>
+              <a:rPr lang="en-GB" sz="1700" dirty="0"/>
+              <a:t> | </a:t>
+            </a:r>
+            <a:r>
+              <a:rPr lang="en-GB" sz="1700" b="1" dirty="0"/>
+              <a:t>NOSQL:</a:t>
+            </a:r>
+            <a:r>
+              <a:rPr lang="en-GB" sz="1700" dirty="0"/>
+              <a:t> </a:t>
+            </a:r>
+            <a:r>
+              <a:rPr lang="en-GB" sz="1700" dirty="0" err="1"/>
+              <a:t>gyors</a:t>
+            </a:r>
+            <a:r>
+              <a:rPr lang="en-GB" sz="1700" dirty="0"/>
+              <a:t> </a:t>
+            </a:r>
+            <a:r>
+              <a:rPr lang="en-GB" sz="1700" dirty="0" err="1"/>
+              <a:t>olvasás</a:t>
+            </a:r>
+            <a:r>
+              <a:rPr lang="en-GB" sz="1700" dirty="0"/>
+              <a:t>/</a:t>
+            </a:r>
+            <a:r>
+              <a:rPr lang="en-GB" sz="1700" dirty="0" err="1"/>
+              <a:t>irás</a:t>
+            </a:r>
+            <a:endParaRPr lang="en-GB" sz="1700" dirty="0"/>
+          </a:p>
+          <a:p>
+            <a:r>
+              <a:rPr lang="en-GB" sz="1700" b="1" dirty="0"/>
+              <a:t>SQL:</a:t>
+            </a:r>
+            <a:r>
+              <a:rPr lang="en-GB" sz="1700" dirty="0"/>
+              <a:t> ACID | </a:t>
+            </a:r>
+            <a:r>
+              <a:rPr lang="en-GB" sz="1700" b="1" dirty="0"/>
+              <a:t>NOSQL:</a:t>
+            </a:r>
+            <a:r>
+              <a:rPr lang="en-GB" sz="1700" dirty="0"/>
+              <a:t> </a:t>
+            </a:r>
+            <a:r>
+              <a:rPr lang="en-GB" sz="1700" dirty="0" err="1"/>
+              <a:t>skálázhatóság</a:t>
+            </a:r>
+            <a:endParaRPr lang="en-GB" sz="1700" dirty="0"/>
+          </a:p>
+          <a:p>
+            <a:r>
+              <a:rPr lang="en-GB" sz="1700" b="1" dirty="0"/>
+              <a:t>SQL:</a:t>
+            </a:r>
+            <a:r>
+              <a:rPr lang="en-GB" sz="1700" dirty="0"/>
+              <a:t> </a:t>
+            </a:r>
+            <a:r>
+              <a:rPr lang="en-GB" sz="1700" dirty="0" err="1"/>
+              <a:t>strukturált</a:t>
+            </a:r>
+            <a:r>
+              <a:rPr lang="en-GB" sz="1700" dirty="0"/>
+              <a:t> | </a:t>
+            </a:r>
+            <a:r>
+              <a:rPr lang="en-GB" sz="1700" b="1" dirty="0"/>
+              <a:t>NOSQL:</a:t>
+            </a:r>
+            <a:r>
+              <a:rPr lang="en-GB" sz="1700" dirty="0"/>
+              <a:t> </a:t>
+            </a:r>
+            <a:r>
+              <a:rPr lang="en-GB" sz="1700" b="1" dirty="0"/>
               <a:t>(</a:t>
             </a:r>
             <a:r>
-              <a:rPr lang="en-GB" sz="1700"/>
-              <a:t>félig/nem</a:t>
-            </a:r>
-            <a:r>
-              <a:rPr lang="en-GB" sz="1700" b="1"/>
+              <a:rPr lang="en-GB" sz="1700" dirty="0" err="1"/>
+              <a:t>félig</a:t>
+            </a:r>
+            <a:r>
+              <a:rPr lang="en-GB" sz="1700" dirty="0"/>
+              <a:t>/</a:t>
+            </a:r>
+            <a:r>
+              <a:rPr lang="en-GB" sz="1700" dirty="0" err="1"/>
+              <a:t>nem</a:t>
+            </a:r>
+            <a:r>
+              <a:rPr lang="en-GB" sz="1700" b="1" dirty="0"/>
               <a:t>) </a:t>
             </a:r>
             <a:r>
-              <a:rPr lang="en-GB" sz="1700"/>
-              <a:t>strukturált </a:t>
-            </a:r>
-          </a:p>
-          <a:p>
-            <a:endParaRPr lang="en-GB" sz="1700"/>
+              <a:rPr lang="en-GB" sz="1700" dirty="0" err="1"/>
+              <a:t>strukturált</a:t>
+            </a:r>
+            <a:r>
+              <a:rPr lang="en-GB" sz="1700" dirty="0"/>
+              <a:t> </a:t>
+            </a:r>
+          </a:p>
+          <a:p>
+            <a:endParaRPr lang="en-GB" sz="1700" dirty="0"/>
           </a:p>
         </p:txBody>
       </p:sp>
@@ -8114,7 +8767,7 @@
           <p:nvPr/>
         </p:nvPicPr>
         <p:blipFill>
-          <a:blip r:embed="rId2"/>
+          <a:blip r:embed="rId3"/>
           <a:stretch>
             <a:fillRect/>
           </a:stretch>
